--- a/static/guide/01_リポジトリの作り方と運用.pptx
+++ b/static/guide/01_リポジトリの作り方と運用.pptx
@@ -2015,8 +2015,8 @@
         </p:nvSpPr>
         <p:spPr>
           <a:xfrm>
-            <a:off x="5394960" y="1051560"/>
-            <a:ext cx="3291840" cy="3017520"/>
+            <a:off x="5394960" y="868680"/>
+            <a:ext cx="3291840" cy="3520440"/>
           </a:xfrm>
           <a:prstGeom prst="rect">
             <a:avLst/>
@@ -2040,7 +2040,7 @@
         </p:nvSpPr>
         <p:spPr>
           <a:xfrm>
-            <a:off x="5623560" y="1207008"/>
+            <a:off x="5623560" y="1024128"/>
             <a:ext cx="2834640" cy="274320"/>
           </a:xfrm>
           <a:prstGeom prst="rect">
@@ -2065,7 +2065,7 @@
                 <a:ea typeface="Consolas" pitchFamily="34" charset="-122"/>
                 <a:cs typeface="Consolas" pitchFamily="34" charset="-120"/>
               </a:rPr>
-              <a:t>// 資料は 4 本</a:t>
+              <a:t>// 資料は 5 本</a:t>
             </a:r>
             <a:endParaRPr lang="en-US" sz="1000" dirty="0"/>
           </a:p>
@@ -2079,7 +2079,7 @@
         </p:nvSpPr>
         <p:spPr>
           <a:xfrm>
-            <a:off x="5623560" y="1600200"/>
+            <a:off x="5623560" y="1417320"/>
             <a:ext cx="411480" cy="237744"/>
           </a:xfrm>
           <a:prstGeom prst="rect">
@@ -2118,7 +2118,7 @@
         </p:nvSpPr>
         <p:spPr>
           <a:xfrm>
-            <a:off x="6035040" y="1600200"/>
+            <a:off x="6035040" y="1417320"/>
             <a:ext cx="2514600" cy="237744"/>
           </a:xfrm>
           <a:prstGeom prst="rect">
@@ -2157,7 +2157,7 @@
         </p:nvSpPr>
         <p:spPr>
           <a:xfrm>
-            <a:off x="6035040" y="1847088"/>
+            <a:off x="6035040" y="1664208"/>
             <a:ext cx="2514600" cy="201168"/>
           </a:xfrm>
           <a:prstGeom prst="rect">
@@ -2196,7 +2196,7 @@
         </p:nvSpPr>
         <p:spPr>
           <a:xfrm>
-            <a:off x="5486400" y="2148840"/>
+            <a:off x="5486400" y="1965960"/>
             <a:ext cx="3108960" cy="548640"/>
           </a:xfrm>
           <a:prstGeom prst="rect">
@@ -2221,7 +2221,7 @@
         </p:nvSpPr>
         <p:spPr>
           <a:xfrm>
-            <a:off x="5623560" y="2203704"/>
+            <a:off x="5623560" y="2020824"/>
             <a:ext cx="411480" cy="237744"/>
           </a:xfrm>
           <a:prstGeom prst="rect">
@@ -2260,7 +2260,7 @@
         </p:nvSpPr>
         <p:spPr>
           <a:xfrm>
-            <a:off x="6035040" y="2203704"/>
+            <a:off x="6035040" y="2020824"/>
             <a:ext cx="2514600" cy="237744"/>
           </a:xfrm>
           <a:prstGeom prst="rect">
@@ -2299,7 +2299,7 @@
         </p:nvSpPr>
         <p:spPr>
           <a:xfrm>
-            <a:off x="6035040" y="2450592"/>
+            <a:off x="6035040" y="2267712"/>
             <a:ext cx="2514600" cy="201168"/>
           </a:xfrm>
           <a:prstGeom prst="rect">
@@ -2338,7 +2338,7 @@
         </p:nvSpPr>
         <p:spPr>
           <a:xfrm>
-            <a:off x="5623560" y="2807208"/>
+            <a:off x="5623560" y="2624328"/>
             <a:ext cx="411480" cy="237744"/>
           </a:xfrm>
           <a:prstGeom prst="rect">
@@ -2377,7 +2377,7 @@
         </p:nvSpPr>
         <p:spPr>
           <a:xfrm>
-            <a:off x="6035040" y="2807208"/>
+            <a:off x="6035040" y="2624328"/>
             <a:ext cx="2514600" cy="237744"/>
           </a:xfrm>
           <a:prstGeom prst="rect">
@@ -2416,7 +2416,7 @@
         </p:nvSpPr>
         <p:spPr>
           <a:xfrm>
-            <a:off x="6035040" y="3054096"/>
+            <a:off x="6035040" y="2871216"/>
             <a:ext cx="2514600" cy="201168"/>
           </a:xfrm>
           <a:prstGeom prst="rect">
@@ -2455,7 +2455,7 @@
         </p:nvSpPr>
         <p:spPr>
           <a:xfrm>
-            <a:off x="5623560" y="3410712"/>
+            <a:off x="5623560" y="3227832"/>
             <a:ext cx="411480" cy="237744"/>
           </a:xfrm>
           <a:prstGeom prst="rect">
@@ -2494,7 +2494,7 @@
         </p:nvSpPr>
         <p:spPr>
           <a:xfrm>
-            <a:off x="6035040" y="3410712"/>
+            <a:off x="6035040" y="3227832"/>
             <a:ext cx="2514600" cy="237744"/>
           </a:xfrm>
           <a:prstGeom prst="rect">
@@ -2533,7 +2533,7 @@
         </p:nvSpPr>
         <p:spPr>
           <a:xfrm>
-            <a:off x="6035040" y="3657600"/>
+            <a:off x="6035040" y="3474720"/>
             <a:ext cx="2514600" cy="201168"/>
           </a:xfrm>
           <a:prstGeom prst="rect">
@@ -2559,6 +2559,123 @@
                 <a:cs typeface="Meiryo" pitchFamily="34" charset="-120"/>
               </a:rPr>
               <a:t>全員・毎日</a:t>
+            </a:r>
+            <a:endParaRPr lang="en-US" sz="900" dirty="0"/>
+          </a:p>
+        </p:txBody>
+      </p:sp>
+      <p:sp>
+        <p:nvSpPr>
+          <p:cNvPr id="23" name="Text 21"/>
+          <p:cNvSpPr txBox="1"/>
+          <p:nvPr/>
+        </p:nvSpPr>
+        <p:spPr>
+          <a:xfrm>
+            <a:off x="5623560" y="3831336"/>
+            <a:ext cx="411480" cy="237744"/>
+          </a:xfrm>
+          <a:prstGeom prst="rect">
+            <a:avLst/>
+          </a:prstGeom>
+          <a:noFill/>
+          <a:ln/>
+        </p:spPr>
+        <p:txBody>
+          <a:bodyPr wrap="square" lIns="0" tIns="0" rIns="0" bIns="0" rtlCol="0" anchor="t"/>
+          <a:lstStyle/>
+          <a:p>
+            <a:pPr indent="0" marL="0">
+              <a:buNone/>
+            </a:pPr>
+            <a:r>
+              <a:rPr lang="en-US" sz="1300" b="1" dirty="0">
+                <a:solidFill>
+                  <a:srgbClr val="B9CAD9"/>
+                </a:solidFill>
+                <a:latin typeface="Consolas" pitchFamily="34" charset="0"/>
+                <a:ea typeface="Consolas" pitchFamily="34" charset="-122"/>
+                <a:cs typeface="Consolas" pitchFamily="34" charset="-120"/>
+              </a:rPr>
+              <a:t>04</a:t>
+            </a:r>
+            <a:endParaRPr lang="en-US" sz="1300" dirty="0"/>
+          </a:p>
+        </p:txBody>
+      </p:sp>
+      <p:sp>
+        <p:nvSpPr>
+          <p:cNvPr id="24" name="Text 22"/>
+          <p:cNvSpPr txBox="1"/>
+          <p:nvPr/>
+        </p:nvSpPr>
+        <p:spPr>
+          <a:xfrm>
+            <a:off x="6035040" y="3831336"/>
+            <a:ext cx="2514600" cy="237744"/>
+          </a:xfrm>
+          <a:prstGeom prst="rect">
+            <a:avLst/>
+          </a:prstGeom>
+          <a:noFill/>
+          <a:ln/>
+        </p:spPr>
+        <p:txBody>
+          <a:bodyPr wrap="square" lIns="0" tIns="0" rIns="0" bIns="0" rtlCol="0" anchor="t"/>
+          <a:lstStyle/>
+          <a:p>
+            <a:pPr indent="0" marL="0">
+              <a:buNone/>
+            </a:pPr>
+            <a:r>
+              <a:rPr lang="en-US" sz="1150" b="1" dirty="0">
+                <a:solidFill>
+                  <a:srgbClr val="B9CAD9"/>
+                </a:solidFill>
+                <a:latin typeface="Meiryo" pitchFamily="34" charset="0"/>
+                <a:ea typeface="Meiryo" pitchFamily="34" charset="-122"/>
+                <a:cs typeface="Meiryo" pitchFamily="34" charset="-120"/>
+              </a:rPr>
+              <a:t>アプリケーション構成</a:t>
+            </a:r>
+            <a:endParaRPr lang="en-US" sz="1150" dirty="0"/>
+          </a:p>
+        </p:txBody>
+      </p:sp>
+      <p:sp>
+        <p:nvSpPr>
+          <p:cNvPr id="25" name="Text 23"/>
+          <p:cNvSpPr txBox="1"/>
+          <p:nvPr/>
+        </p:nvSpPr>
+        <p:spPr>
+          <a:xfrm>
+            <a:off x="6035040" y="4078224"/>
+            <a:ext cx="2514600" cy="201168"/>
+          </a:xfrm>
+          <a:prstGeom prst="rect">
+            <a:avLst/>
+          </a:prstGeom>
+          <a:noFill/>
+          <a:ln/>
+        </p:spPr>
+        <p:txBody>
+          <a:bodyPr wrap="square" lIns="0" tIns="0" rIns="0" bIns="0" rtlCol="0" anchor="t"/>
+          <a:lstStyle/>
+          <a:p>
+            <a:pPr indent="0" marL="0">
+              <a:buNone/>
+            </a:pPr>
+            <a:r>
+              <a:rPr lang="en-US" sz="900" dirty="0">
+                <a:solidFill>
+                  <a:srgbClr val="B9CAD9"/>
+                </a:solidFill>
+                <a:latin typeface="Meiryo" pitchFamily="34" charset="0"/>
+                <a:ea typeface="Meiryo" pitchFamily="34" charset="-122"/>
+                <a:cs typeface="Meiryo" pitchFamily="34" charset="-120"/>
+              </a:rPr>
+              <a:t>全員</a:t>
             </a:r>
             <a:endParaRPr lang="en-US" sz="900" dirty="0"/>
           </a:p>

--- a/static/guide/01_リポジトリの作り方と運用.pptx
+++ b/static/guide/01_リポジトリの作り方と運用.pptx
@@ -2785,7 +2785,7 @@
                 <a:ea typeface="Meiryo" pitchFamily="34" charset="-122"/>
                 <a:cs typeface="Meiryo" pitchFamily="34" charset="-120"/>
               </a:rPr>
-              <a:t>アプリを動かす場所（構成案）</a:t>
+              <a:t>アプリは homepage の中で動かす</a:t>
             </a:r>
             <a:endParaRPr lang="en-US" sz="2600" dirty="0"/>
           </a:p>
@@ -2851,7 +2851,7 @@
                 <a:ea typeface="Meiryo" pitchFamily="34" charset="-122"/>
                 <a:cs typeface="Meiryo" pitchFamily="34" charset="-120"/>
               </a:rPr>
-              <a:t>準備中</a:t>
+              <a:t>稼働中</a:t>
             </a:r>
             <a:endParaRPr lang="en-US" sz="900" dirty="0"/>
           </a:p>
@@ -3049,7 +3049,7 @@
                 <a:ea typeface="Meiryo" pitchFamily="34" charset="-122"/>
                 <a:cs typeface="Meiryo" pitchFamily="34" charset="-120"/>
               </a:rPr>
-              <a:t>WG のリポジトリ</a:t>
+              <a:t>WG のリポジトリ（非公開）</a:t>
             </a:r>
             <a:endParaRPr lang="en-US" sz="1000" dirty="0"/>
           </a:p>
@@ -3176,7 +3176,7 @@
                 <a:ea typeface="Meiryo" pitchFamily="34" charset="-122"/>
                 <a:cs typeface="Meiryo" pitchFamily="34" charset="-120"/>
               </a:rPr>
-              <a:t>テスト・イメージを作る</a:t>
+              <a:t>main への push で起動</a:t>
             </a:r>
             <a:endParaRPr lang="en-US" sz="1000" dirty="0"/>
           </a:p>
@@ -3264,7 +3264,7 @@
                 <a:ea typeface="Consolas" pitchFamily="34" charset="-122"/>
                 <a:cs typeface="Consolas" pitchFamily="34" charset="-120"/>
               </a:rPr>
-              <a:t>ghcr.io</a:t>
+              <a:t>homepage</a:t>
             </a:r>
             <a:endParaRPr lang="en-US" sz="1100" dirty="0"/>
           </a:p>
@@ -3303,7 +3303,7 @@
                 <a:ea typeface="Meiryo" pitchFamily="34" charset="-122"/>
                 <a:cs typeface="Meiryo" pitchFamily="34" charset="-120"/>
               </a:rPr>
-              <a:t>コンテナイメージ</a:t>
+              <a:t>取り込んで zip を作る</a:t>
             </a:r>
             <a:endParaRPr lang="en-US" sz="1000" dirty="0"/>
           </a:p>
@@ -3505,7 +3505,7 @@
                 <a:ea typeface="Consolas" pitchFamily="34" charset="-122"/>
                 <a:cs typeface="Consolas" pitchFamily="34" charset="-120"/>
               </a:rPr>
-              <a:t>RG: funitclub-wg-&lt;名前&gt;</a:t>
+              <a:t>App Service: funITclub</a:t>
             </a:r>
             <a:endParaRPr lang="en-US" sz="1000" dirty="0"/>
           </a:p>
@@ -3569,7 +3569,7 @@
                 <a:ea typeface="Meiryo" pitchFamily="34" charset="-122"/>
                 <a:cs typeface="Meiryo" pitchFamily="34" charset="-120"/>
               </a:rPr>
-              <a:t>Container App</a:t>
+              <a:t>wg/&lt;名前&gt;/</a:t>
             </a:r>
             <a:endParaRPr lang="en-US" sz="1300" dirty="0"/>
           </a:p>
@@ -3608,7 +3608,7 @@
                 <a:ea typeface="Meiryo" pitchFamily="34" charset="-122"/>
                 <a:cs typeface="Meiryo" pitchFamily="34" charset="-120"/>
               </a:rPr>
-              <a:t>使われないときは 0 台まで縮む</a:t>
+              <a:t>/&lt;名前&gt;/ で動く。一覧から辿って開く</a:t>
             </a:r>
             <a:endParaRPr lang="en-US" sz="950" dirty="0"/>
           </a:p>
@@ -3647,7 +3647,7 @@
                 <a:ea typeface="Meiryo" pitchFamily="34" charset="-122"/>
                 <a:cs typeface="Meiryo" pitchFamily="34" charset="-120"/>
               </a:rPr>
-              <a:t>WG ごとに 1 つ作る</a:t>
+              <a:t>デプロイ時だけ取り込む</a:t>
             </a:r>
             <a:endParaRPr lang="en-US" sz="1100" dirty="0"/>
           </a:p>
@@ -3686,7 +3686,7 @@
                 <a:ea typeface="Meiryo" pitchFamily="34" charset="-122"/>
                 <a:cs typeface="Meiryo" pitchFamily="34" charset="-120"/>
               </a:rPr>
-              <a:t>デプロイの権限はこの RG の中だけ</a:t>
+              <a:t>公表したら works/ へ移す</a:t>
             </a:r>
             <a:endParaRPr lang="en-US" sz="950" dirty="0"/>
           </a:p>
@@ -3750,7 +3750,7 @@
                 <a:ea typeface="Consolas" pitchFamily="34" charset="-122"/>
                 <a:cs typeface="Consolas" pitchFamily="34" charset="-120"/>
               </a:rPr>
-              <a:t>RG: hirahira</a:t>
+              <a:t>同じアプリの中</a:t>
             </a:r>
             <a:endParaRPr lang="en-US" sz="1000" dirty="0"/>
           </a:p>
@@ -3793,7 +3793,7 @@
                 <a:ea typeface="Meiryo" pitchFamily="34" charset="-122"/>
                 <a:cs typeface="Meiryo" pitchFamily="34" charset="-120"/>
               </a:rPr>
-              <a:t>homepage</a:t>
+              <a:t>homepage の画面</a:t>
             </a:r>
             <a:endParaRPr lang="en-US" sz="1100" dirty="0"/>
           </a:p>
@@ -3898,7 +3898,7 @@
                 <a:ea typeface="Meiryo" pitchFamily="34" charset="-122"/>
                 <a:cs typeface="Meiryo" pitchFamily="34" charset="-120"/>
               </a:rPr>
-              <a:t>WG からは触らない</a:t>
+              <a:t>WG のアプリも同じものを使う</a:t>
             </a:r>
             <a:endParaRPr lang="en-US" sz="1000" dirty="0"/>
           </a:p>
@@ -3993,7 +3993,7 @@
                 <a:ea typeface="Consolas" pitchFamily="34" charset="-122"/>
                 <a:cs typeface="Consolas" pitchFamily="34" charset="-120"/>
               </a:rPr>
-              <a:t>// 01  ·  公開  ·  なぜ分けるか</a:t>
+              <a:t>// 01  ·  公開  ·  気をつけること</a:t>
             </a:r>
             <a:endParaRPr lang="en-US" sz="1100" dirty="0"/>
           </a:p>
@@ -4032,7 +4032,7 @@
                 <a:ea typeface="Meiryo" pitchFamily="34" charset="-122"/>
                 <a:cs typeface="Meiryo" pitchFamily="34" charset="-120"/>
               </a:rPr>
-              <a:t>リソースグループは WG ごとに分ける</a:t>
+              <a:t>同じアプリで動かすので、3 つに気をつける</a:t>
             </a:r>
             <a:endParaRPr lang="en-US" sz="2600" dirty="0"/>
           </a:p>
@@ -4152,7 +4152,7 @@
                 <a:ea typeface="Meiryo" pitchFamily="34" charset="-122"/>
                 <a:cs typeface="Meiryo" pitchFamily="34" charset="-120"/>
               </a:rPr>
-              <a:t>権限を閉じる</a:t>
+              <a:t>一覧から入る</a:t>
             </a:r>
             <a:endParaRPr lang="en-US" sz="1700" dirty="0"/>
           </a:p>
@@ -4194,7 +4194,7 @@
                 <a:ea typeface="Meiryo" pitchFamily="34" charset="-122"/>
                 <a:cs typeface="Meiryo" pitchFamily="34" charset="-120"/>
               </a:rPr>
-              <a:t>WG のデプロイは自分の RG の中だけに届く。homepage・DB・Key Vault には触れない。</a:t>
+              <a:t>URL を直に開いた人は一覧へ送り返される。入口を funitclub に集めるため。</a:t>
             </a:r>
             <a:endParaRPr lang="en-US" sz="1100" dirty="0"/>
           </a:p>
@@ -4314,7 +4314,7 @@
                 <a:ea typeface="Meiryo" pitchFamily="34" charset="-122"/>
                 <a:cs typeface="Meiryo" pitchFamily="34" charset="-120"/>
               </a:rPr>
-              <a:t>費用が見える</a:t>
+              <a:t>壊すと全体に響く</a:t>
             </a:r>
             <a:endParaRPr lang="en-US" sz="1700" dirty="0"/>
           </a:p>
@@ -4356,7 +4356,7 @@
                 <a:ea typeface="Meiryo" pitchFamily="34" charset="-122"/>
                 <a:cs typeface="Meiryo" pitchFamily="34" charset="-120"/>
               </a:rPr>
-              <a:t>料金を RG ごとに集計できる。どの WG にいくらかかったか分かる。</a:t>
+              <a:t>homepage と同じプロセス・同じ DB。起動に失敗するとサイト全体が止まる。</a:t>
             </a:r>
             <a:endParaRPr lang="en-US" sz="1100" dirty="0"/>
           </a:p>
@@ -4476,7 +4476,7 @@
                 <a:ea typeface="Meiryo" pitchFamily="34" charset="-122"/>
                 <a:cs typeface="Meiryo" pitchFamily="34" charset="-120"/>
               </a:rPr>
-              <a:t>片付けが簡単</a:t>
+              <a:t>出す前に確かめる</a:t>
             </a:r>
             <a:endParaRPr lang="en-US" sz="1700" dirty="0"/>
           </a:p>
@@ -4518,7 +4518,7 @@
                 <a:ea typeface="Meiryo" pitchFamily="34" charset="-122"/>
                 <a:cs typeface="Meiryo" pitchFamily="34" charset="-120"/>
               </a:rPr>
-              <a:t>WG が終わったら RG ごと削除する。消し忘れのリソースが残らない。</a:t>
+              <a:t>取り込んだ状態でテストと migrate を流す。応答が無ければ直前の状態に戻す。</a:t>
             </a:r>
             <a:endParaRPr lang="en-US" sz="1100" dirty="0"/>
           </a:p>
@@ -4557,7 +4557,7 @@
                 <a:ea typeface="Meiryo" pitchFamily="34" charset="-122"/>
                 <a:cs typeface="Meiryo" pitchFamily="34" charset="-120"/>
               </a:rPr>
-              <a:t>homepage は今の RG（hirahira）のまま。hirahira_room や DB と同じ場所にあるため、WG のリソースは入れない。</a:t>
+              <a:t>運営は homepage の wg-apps.yml に WG を登録し、WG のリポジトリに起動用のシークレットを入れる（deploy.txt）。</a:t>
             </a:r>
             <a:endParaRPr lang="en-US" sz="1050" dirty="0"/>
           </a:p>

--- a/static/guide/01_リポジトリの作り方と運用.pptx
+++ b/static/guide/01_リポジトリの作り方と運用.pptx
@@ -15,6 +15,7 @@
     <p:sldId id="263" r:id="rId9"/>
     <p:sldId id="264" r:id="rId10"/>
     <p:sldId id="265" r:id="rId11"/>
+    <p:sldId id="267" r:id="rId18"/>
     <p:sldId id="266" r:id="rId12"/>
   </p:sldIdLst>
   <p:notesMasterIdLst>
@@ -3937,6 +3938,1248 @@
 </file>
 
 <file path=ppt/slides/slide11.xml><?xml version="1.0" encoding="utf-8"?>
+<p:sld xmlns:a="http://schemas.openxmlformats.org/drawingml/2006/main" xmlns:p="http://schemas.openxmlformats.org/presentationml/2006/main" xmlns:r="http://schemas.openxmlformats.org/officeDocument/2006/relationships">
+  <p:cSld name="Slide 9">
+    <p:bg>
+      <p:bgPr>
+        <a:solidFill>
+          <a:srgbClr val="F2F5F8"/>
+        </a:solidFill>
+      </p:bgPr>
+    </p:bg>
+    <p:spTree>
+      <p:nvGrpSpPr>
+        <p:cNvPr id="1" name=""/>
+        <p:cNvGrpSpPr/>
+        <p:nvPr/>
+      </p:nvGrpSpPr>
+      <p:grpSpPr>
+        <a:xfrm>
+          <a:off x="0" y="0"/>
+          <a:ext cx="0" cy="0"/>
+          <a:chOff x="0" y="0"/>
+          <a:chExt cx="0" cy="0"/>
+        </a:xfrm>
+      </p:grpSpPr>
+      <p:sp>
+        <p:nvSpPr>
+          <p:cNvPr id="2" name="Text 0"/>
+          <p:cNvSpPr txBox="1"/>
+          <p:nvPr/>
+        </p:nvSpPr>
+        <p:spPr>
+          <a:xfrm>
+            <a:off x="457200" y="320040"/>
+            <a:ext cx="6858000" cy="274320"/>
+          </a:xfrm>
+          <a:prstGeom prst="rect">
+            <a:avLst/>
+          </a:prstGeom>
+          <a:noFill/>
+          <a:ln/>
+        </p:spPr>
+        <p:txBody>
+          <a:bodyPr wrap="square" lIns="0" tIns="0" rIns="0" bIns="0" rtlCol="0" anchor="t"/>
+          <a:lstStyle/>
+          <a:p>
+            <a:pPr indent="0" marL="0">
+              <a:buNone/>
+            </a:pPr>
+            <a:r>
+              <a:rPr lang="en-US" sz="1100" dirty="0">
+                <a:solidFill>
+                  <a:srgbClr val="1A4A70"/>
+                </a:solidFill>
+                <a:latin typeface="Consolas" pitchFamily="34" charset="0"/>
+                <a:ea typeface="Consolas" pitchFamily="34" charset="-122"/>
+                <a:cs typeface="Consolas" pitchFamily="34" charset="-120"/>
+              </a:rPr>
+              <a:t>// 01  ·  公開  ·  登録</a:t>
+            </a:r>
+            <a:endParaRPr lang="en-US" sz="1100" dirty="0"/>
+          </a:p>
+        </p:txBody>
+      </p:sp>
+      <p:sp>
+        <p:nvSpPr>
+          <p:cNvPr id="3" name="Text 1"/>
+          <p:cNvSpPr txBox="1"/>
+          <p:nvPr/>
+        </p:nvSpPr>
+        <p:spPr>
+          <a:xfrm>
+            <a:off x="457200" y="594360"/>
+            <a:ext cx="8229600" cy="594360"/>
+          </a:xfrm>
+          <a:prstGeom prst="rect">
+            <a:avLst/>
+          </a:prstGeom>
+          <a:noFill/>
+          <a:ln/>
+        </p:spPr>
+        <p:txBody>
+          <a:bodyPr wrap="square" lIns="0" tIns="0" rIns="0" bIns="0" rtlCol="0" anchor="ctr"/>
+          <a:lstStyle/>
+          <a:p>
+            <a:pPr indent="0" marL="0">
+              <a:buNone/>
+            </a:pPr>
+            <a:r>
+              <a:rPr lang="en-US" sz="2600" b="1" dirty="0">
+                <a:solidFill>
+                  <a:srgbClr val="001E3C"/>
+                </a:solidFill>
+                <a:latin typeface="Meiryo" pitchFamily="34" charset="0"/>
+                <a:ea typeface="Meiryo" pitchFamily="34" charset="-122"/>
+                <a:cs typeface="Meiryo" pitchFamily="34" charset="-120"/>
+              </a:rPr>
+              <a:t>アプリを載せるときの登録</a:t>
+            </a:r>
+            <a:endParaRPr lang="en-US" sz="2600" dirty="0"/>
+          </a:p>
+        </p:txBody>
+      </p:sp>
+      <p:sp>
+        <p:nvSpPr>
+          <p:cNvPr id="4" name="Shape 2"/>
+          <p:cNvSpPr/>
+          <p:nvPr/>
+        </p:nvSpPr>
+        <p:spPr>
+          <a:xfrm>
+            <a:off x="457200" y="1417320"/>
+            <a:ext cx="4023360" cy="3154680"/>
+          </a:xfrm>
+          <a:prstGeom prst="rect">
+            <a:avLst/>
+          </a:prstGeom>
+          <a:solidFill>
+            <a:srgbClr val="FFFFFF"/>
+          </a:solidFill>
+          <a:ln w="12700">
+            <a:solidFill>
+              <a:srgbClr val="FFFFFF"/>
+            </a:solidFill>
+            <a:prstDash val="solid"/>
+          </a:ln>
+          <a:effectLst>
+            <a:outerShdw sx="100000" sy="100000" kx="0" ky="0" algn="bl" rotWithShape="0" blurRad="76200" dist="25400" dir="5400000">
+              <a:srgbClr val="000000">
+                <a:alpha val="12000"/>
+              </a:srgbClr>
+            </a:outerShdw>
+          </a:effectLst>
+        </p:spPr>
+        <p:txBody>
+          <a:bodyPr/>
+          <a:p/>
+        </p:txBody>
+      </p:sp>
+      <p:sp>
+        <p:nvSpPr>
+          <p:cNvPr id="5" name="Shape 3"/>
+          <p:cNvSpPr/>
+          <p:nvPr/>
+        </p:nvSpPr>
+        <p:spPr>
+          <a:xfrm>
+            <a:off x="685800" y="1618488"/>
+            <a:ext cx="457200" cy="457200"/>
+          </a:xfrm>
+          <a:prstGeom prst="ellipse">
+            <a:avLst/>
+          </a:prstGeom>
+          <a:solidFill>
+            <a:srgbClr val="5BB8FF"/>
+          </a:solidFill>
+          <a:ln w="12700">
+            <a:solidFill>
+              <a:srgbClr val="5BB8FF"/>
+            </a:solidFill>
+            <a:prstDash val="solid"/>
+          </a:ln>
+        </p:spPr>
+        <p:txBody>
+          <a:bodyPr/>
+          <a:p/>
+        </p:txBody>
+      </p:sp>
+      <p:sp>
+        <p:nvSpPr>
+          <p:cNvPr id="7" name="Text 4"/>
+          <p:cNvSpPr txBox="1"/>
+          <p:nvPr/>
+        </p:nvSpPr>
+        <p:spPr>
+          <a:xfrm>
+            <a:off x="1280160" y="1618488"/>
+            <a:ext cx="3017520" cy="457200"/>
+          </a:xfrm>
+          <a:prstGeom prst="rect">
+            <a:avLst/>
+          </a:prstGeom>
+          <a:noFill/>
+          <a:ln/>
+        </p:spPr>
+        <p:txBody>
+          <a:bodyPr wrap="square" lIns="0" tIns="0" rIns="0" bIns="0" rtlCol="0" anchor="ctr"/>
+          <a:lstStyle/>
+          <a:p>
+            <a:pPr indent="0" marL="0">
+              <a:buNone/>
+            </a:pPr>
+            <a:r>
+              <a:rPr lang="en-US" sz="1400" b="1" dirty="0">
+                <a:solidFill>
+                  <a:srgbClr val="001E3C"/>
+                </a:solidFill>
+                <a:latin typeface="Meiryo" pitchFamily="34" charset="0"/>
+                <a:ea typeface="Meiryo" pitchFamily="34" charset="-122"/>
+                <a:cs typeface="Meiryo" pitchFamily="34" charset="-120"/>
+              </a:rPr>
+              <a:t>一度だけ（WG ごと）</a:t>
+            </a:r>
+            <a:endParaRPr lang="en-US" sz="1400" dirty="0"/>
+          </a:p>
+        </p:txBody>
+      </p:sp>
+      <p:sp>
+        <p:nvSpPr>
+          <p:cNvPr id="8" name="Shape 5"/>
+          <p:cNvSpPr/>
+          <p:nvPr/>
+        </p:nvSpPr>
+        <p:spPr>
+          <a:xfrm>
+            <a:off x="685800" y="2286000"/>
+            <a:ext cx="310896" cy="310896"/>
+          </a:xfrm>
+          <a:prstGeom prst="ellipse">
+            <a:avLst/>
+          </a:prstGeom>
+          <a:solidFill>
+            <a:srgbClr val="001E3C"/>
+          </a:solidFill>
+          <a:ln w="12700">
+            <a:solidFill>
+              <a:srgbClr val="001E3C"/>
+            </a:solidFill>
+            <a:prstDash val="solid"/>
+          </a:ln>
+        </p:spPr>
+        <p:txBody>
+          <a:bodyPr/>
+          <a:p/>
+        </p:txBody>
+      </p:sp>
+      <p:sp>
+        <p:nvSpPr>
+          <p:cNvPr id="9" name="Text 6"/>
+          <p:cNvSpPr txBox="1"/>
+          <p:nvPr/>
+        </p:nvSpPr>
+        <p:spPr>
+          <a:xfrm>
+            <a:off x="685800" y="2286000"/>
+            <a:ext cx="310896" cy="310896"/>
+          </a:xfrm>
+          <a:prstGeom prst="rect">
+            <a:avLst/>
+          </a:prstGeom>
+          <a:noFill/>
+          <a:ln/>
+        </p:spPr>
+        <p:txBody>
+          <a:bodyPr wrap="square" lIns="0" tIns="0" rIns="0" bIns="0" rtlCol="0" anchor="ctr"/>
+          <a:lstStyle/>
+          <a:p>
+            <a:pPr algn="ctr" indent="0" marL="0">
+              <a:buNone/>
+            </a:pPr>
+            <a:r>
+              <a:rPr lang="en-US" sz="1100" b="1" dirty="0">
+                <a:solidFill>
+                  <a:srgbClr val="FFFFFF"/>
+                </a:solidFill>
+                <a:latin typeface="Consolas" pitchFamily="34" charset="0"/>
+                <a:ea typeface="Consolas" pitchFamily="34" charset="-122"/>
+                <a:cs typeface="Consolas" pitchFamily="34" charset="-120"/>
+              </a:rPr>
+              <a:t>1</a:t>
+            </a:r>
+            <a:endParaRPr lang="en-US" sz="1100" dirty="0"/>
+          </a:p>
+        </p:txBody>
+      </p:sp>
+      <p:sp>
+        <p:nvSpPr>
+          <p:cNvPr id="10" name="Text 7"/>
+          <p:cNvSpPr txBox="1"/>
+          <p:nvPr/>
+        </p:nvSpPr>
+        <p:spPr>
+          <a:xfrm>
+            <a:off x="1124712" y="2295144"/>
+            <a:ext cx="3172968" cy="274320"/>
+          </a:xfrm>
+          <a:prstGeom prst="rect">
+            <a:avLst/>
+          </a:prstGeom>
+          <a:noFill/>
+          <a:ln/>
+        </p:spPr>
+        <p:txBody>
+          <a:bodyPr wrap="square" lIns="0" tIns="0" rIns="0" bIns="0" rtlCol="0" anchor="t"/>
+          <a:lstStyle/>
+          <a:p>
+            <a:pPr indent="0" marL="0">
+              <a:buNone/>
+            </a:pPr>
+            <a:r>
+              <a:rPr lang="en-US" sz="1200" b="1" dirty="0">
+                <a:solidFill>
+                  <a:srgbClr val="001E3C"/>
+                </a:solidFill>
+                <a:latin typeface="Meiryo" pitchFamily="34" charset="0"/>
+                <a:ea typeface="Meiryo" pitchFamily="34" charset="-122"/>
+                <a:cs typeface="Meiryo" pitchFamily="34" charset="-120"/>
+              </a:rPr>
+              <a:t>GitHub App をこのリポジトリにも入れる</a:t>
+            </a:r>
+            <a:endParaRPr lang="en-US" sz="1200" dirty="0"/>
+          </a:p>
+        </p:txBody>
+      </p:sp>
+      <p:sp>
+        <p:nvSpPr>
+          <p:cNvPr id="11" name="Text 8"/>
+          <p:cNvSpPr txBox="1"/>
+          <p:nvPr/>
+        </p:nvSpPr>
+        <p:spPr>
+          <a:xfrm>
+            <a:off x="1124712" y="2560320"/>
+            <a:ext cx="3172968" cy="512064"/>
+          </a:xfrm>
+          <a:prstGeom prst="rect">
+            <a:avLst/>
+          </a:prstGeom>
+          <a:noFill/>
+          <a:ln/>
+        </p:spPr>
+        <p:txBody>
+          <a:bodyPr wrap="square" lIns="0" tIns="0" rIns="0" bIns="0" rtlCol="0" anchor="t"/>
+          <a:lstStyle/>
+          <a:p>
+            <a:pPr indent="0" marL="0">
+              <a:buNone/>
+            </a:pPr>
+            <a:r>
+              <a:rPr lang="en-US" sz="1000" dirty="0">
+                <a:solidFill>
+                  <a:srgbClr val="1B2B3A"/>
+                </a:solidFill>
+                <a:latin typeface="Meiryo" pitchFamily="34" charset="0"/>
+                <a:ea typeface="Meiryo" pitchFamily="34" charset="-122"/>
+                <a:cs typeface="Meiryo" pitchFamily="34" charset="-120"/>
+              </a:rPr>
+              <a:t>App の「Install App」→「Only select repositories」に足す</a:t>
+            </a:r>
+            <a:endParaRPr lang="en-US" sz="1000" dirty="0"/>
+          </a:p>
+        </p:txBody>
+      </p:sp>
+      <p:sp>
+        <p:nvSpPr>
+          <p:cNvPr id="12" name="Shape 9"/>
+          <p:cNvSpPr/>
+          <p:nvPr/>
+        </p:nvSpPr>
+        <p:spPr>
+          <a:xfrm>
+            <a:off x="685800" y="3090672"/>
+            <a:ext cx="310896" cy="310896"/>
+          </a:xfrm>
+          <a:prstGeom prst="ellipse">
+            <a:avLst/>
+          </a:prstGeom>
+          <a:solidFill>
+            <a:srgbClr val="001E3C"/>
+          </a:solidFill>
+          <a:ln w="12700">
+            <a:solidFill>
+              <a:srgbClr val="001E3C"/>
+            </a:solidFill>
+            <a:prstDash val="solid"/>
+          </a:ln>
+        </p:spPr>
+        <p:txBody>
+          <a:bodyPr/>
+          <a:p/>
+        </p:txBody>
+      </p:sp>
+      <p:sp>
+        <p:nvSpPr>
+          <p:cNvPr id="13" name="Text 10"/>
+          <p:cNvSpPr txBox="1"/>
+          <p:nvPr/>
+        </p:nvSpPr>
+        <p:spPr>
+          <a:xfrm>
+            <a:off x="685800" y="3090672"/>
+            <a:ext cx="310896" cy="310896"/>
+          </a:xfrm>
+          <a:prstGeom prst="rect">
+            <a:avLst/>
+          </a:prstGeom>
+          <a:noFill/>
+          <a:ln/>
+        </p:spPr>
+        <p:txBody>
+          <a:bodyPr wrap="square" lIns="0" tIns="0" rIns="0" bIns="0" rtlCol="0" anchor="ctr"/>
+          <a:lstStyle/>
+          <a:p>
+            <a:pPr algn="ctr" indent="0" marL="0">
+              <a:buNone/>
+            </a:pPr>
+            <a:r>
+              <a:rPr lang="en-US" sz="1100" b="1" dirty="0">
+                <a:solidFill>
+                  <a:srgbClr val="FFFFFF"/>
+                </a:solidFill>
+                <a:latin typeface="Consolas" pitchFamily="34" charset="0"/>
+                <a:ea typeface="Consolas" pitchFamily="34" charset="-122"/>
+                <a:cs typeface="Consolas" pitchFamily="34" charset="-120"/>
+              </a:rPr>
+              <a:t>2</a:t>
+            </a:r>
+            <a:endParaRPr lang="en-US" sz="1100" dirty="0"/>
+          </a:p>
+        </p:txBody>
+      </p:sp>
+      <p:sp>
+        <p:nvSpPr>
+          <p:cNvPr id="14" name="Text 11"/>
+          <p:cNvSpPr txBox="1"/>
+          <p:nvPr/>
+        </p:nvSpPr>
+        <p:spPr>
+          <a:xfrm>
+            <a:off x="1124712" y="3099816"/>
+            <a:ext cx="3172968" cy="274320"/>
+          </a:xfrm>
+          <a:prstGeom prst="rect">
+            <a:avLst/>
+          </a:prstGeom>
+          <a:noFill/>
+          <a:ln/>
+        </p:spPr>
+        <p:txBody>
+          <a:bodyPr wrap="square" lIns="0" tIns="0" rIns="0" bIns="0" rtlCol="0" anchor="t"/>
+          <a:lstStyle/>
+          <a:p>
+            <a:pPr indent="0" marL="0">
+              <a:buNone/>
+            </a:pPr>
+            <a:r>
+              <a:rPr lang="en-US" sz="1200" b="1" dirty="0">
+                <a:solidFill>
+                  <a:srgbClr val="001E3C"/>
+                </a:solidFill>
+                <a:latin typeface="Meiryo" pitchFamily="34" charset="0"/>
+                <a:ea typeface="Meiryo" pitchFamily="34" charset="-122"/>
+                <a:cs typeface="Meiryo" pitchFamily="34" charset="-120"/>
+              </a:rPr>
+              <a:t>シークレットを 2 つ入れる</a:t>
+            </a:r>
+            <a:endParaRPr lang="en-US" sz="1200" dirty="0"/>
+          </a:p>
+        </p:txBody>
+      </p:sp>
+      <p:sp>
+        <p:nvSpPr>
+          <p:cNvPr id="15" name="Text 12"/>
+          <p:cNvSpPr txBox="1"/>
+          <p:nvPr/>
+        </p:nvSpPr>
+        <p:spPr>
+          <a:xfrm>
+            <a:off x="1124712" y="3364992"/>
+            <a:ext cx="3172968" cy="512064"/>
+          </a:xfrm>
+          <a:prstGeom prst="rect">
+            <a:avLst/>
+          </a:prstGeom>
+          <a:noFill/>
+          <a:ln/>
+        </p:spPr>
+        <p:txBody>
+          <a:bodyPr wrap="square" lIns="0" tIns="0" rIns="0" bIns="0" rtlCol="0" anchor="t"/>
+          <a:lstStyle/>
+          <a:p>
+            <a:pPr indent="0" marL="0">
+              <a:buNone/>
+            </a:pPr>
+            <a:r>
+              <a:rPr lang="en-US" sz="1000" dirty="0">
+                <a:solidFill>
+                  <a:srgbClr val="1B2B3A"/>
+                </a:solidFill>
+                <a:latin typeface="Meiryo" pitchFamily="34" charset="0"/>
+                <a:ea typeface="Meiryo" pitchFamily="34" charset="-122"/>
+                <a:cs typeface="Meiryo" pitchFamily="34" charset="-120"/>
+              </a:rPr>
+              <a:t>鍵を作り、HOMEPAGE_DEPLOY_APP_ID と _PRIVATE_KEY を入れる</a:t>
+            </a:r>
+            <a:endParaRPr lang="en-US" sz="1000" dirty="0"/>
+          </a:p>
+        </p:txBody>
+      </p:sp>
+      <p:sp>
+        <p:nvSpPr>
+          <p:cNvPr id="16" name="Shape 13"/>
+          <p:cNvSpPr/>
+          <p:nvPr/>
+        </p:nvSpPr>
+        <p:spPr>
+          <a:xfrm>
+            <a:off x="685800" y="3895344"/>
+            <a:ext cx="310896" cy="310896"/>
+          </a:xfrm>
+          <a:prstGeom prst="ellipse">
+            <a:avLst/>
+          </a:prstGeom>
+          <a:solidFill>
+            <a:srgbClr val="001E3C"/>
+          </a:solidFill>
+          <a:ln w="12700">
+            <a:solidFill>
+              <a:srgbClr val="001E3C"/>
+            </a:solidFill>
+            <a:prstDash val="solid"/>
+          </a:ln>
+        </p:spPr>
+        <p:txBody>
+          <a:bodyPr/>
+          <a:p/>
+        </p:txBody>
+      </p:sp>
+      <p:sp>
+        <p:nvSpPr>
+          <p:cNvPr id="17" name="Text 14"/>
+          <p:cNvSpPr txBox="1"/>
+          <p:nvPr/>
+        </p:nvSpPr>
+        <p:spPr>
+          <a:xfrm>
+            <a:off x="685800" y="3895344"/>
+            <a:ext cx="310896" cy="310896"/>
+          </a:xfrm>
+          <a:prstGeom prst="rect">
+            <a:avLst/>
+          </a:prstGeom>
+          <a:noFill/>
+          <a:ln/>
+        </p:spPr>
+        <p:txBody>
+          <a:bodyPr wrap="square" lIns="0" tIns="0" rIns="0" bIns="0" rtlCol="0" anchor="ctr"/>
+          <a:lstStyle/>
+          <a:p>
+            <a:pPr algn="ctr" indent="0" marL="0">
+              <a:buNone/>
+            </a:pPr>
+            <a:r>
+              <a:rPr lang="en-US" sz="1100" b="1" dirty="0">
+                <a:solidFill>
+                  <a:srgbClr val="FFFFFF"/>
+                </a:solidFill>
+                <a:latin typeface="Consolas" pitchFamily="34" charset="0"/>
+                <a:ea typeface="Consolas" pitchFamily="34" charset="-122"/>
+                <a:cs typeface="Consolas" pitchFamily="34" charset="-120"/>
+              </a:rPr>
+              <a:t>3</a:t>
+            </a:r>
+            <a:endParaRPr lang="en-US" sz="1100" dirty="0"/>
+          </a:p>
+        </p:txBody>
+      </p:sp>
+      <p:sp>
+        <p:nvSpPr>
+          <p:cNvPr id="18" name="Text 15"/>
+          <p:cNvSpPr txBox="1"/>
+          <p:nvPr/>
+        </p:nvSpPr>
+        <p:spPr>
+          <a:xfrm>
+            <a:off x="1124712" y="3904488"/>
+            <a:ext cx="3172968" cy="274320"/>
+          </a:xfrm>
+          <a:prstGeom prst="rect">
+            <a:avLst/>
+          </a:prstGeom>
+          <a:noFill/>
+          <a:ln/>
+        </p:spPr>
+        <p:txBody>
+          <a:bodyPr wrap="square" lIns="0" tIns="0" rIns="0" bIns="0" rtlCol="0" anchor="t"/>
+          <a:lstStyle/>
+          <a:p>
+            <a:pPr indent="0" marL="0">
+              <a:buNone/>
+            </a:pPr>
+            <a:r>
+              <a:rPr lang="en-US" sz="1200" b="1" dirty="0">
+                <a:solidFill>
+                  <a:srgbClr val="001E3C"/>
+                </a:solidFill>
+                <a:latin typeface="Meiryo" pitchFamily="34" charset="0"/>
+                <a:ea typeface="Meiryo" pitchFamily="34" charset="-122"/>
+                <a:cs typeface="Meiryo" pitchFamily="34" charset="-120"/>
+              </a:rPr>
+              <a:t>wg-apps.yml に 1 行足す</a:t>
+            </a:r>
+            <a:endParaRPr lang="en-US" sz="1200" dirty="0"/>
+          </a:p>
+        </p:txBody>
+      </p:sp>
+      <p:sp>
+        <p:nvSpPr>
+          <p:cNvPr id="19" name="Text 16"/>
+          <p:cNvSpPr txBox="1"/>
+          <p:nvPr/>
+        </p:nvSpPr>
+        <p:spPr>
+          <a:xfrm>
+            <a:off x="1124712" y="4169664"/>
+            <a:ext cx="3172968" cy="512064"/>
+          </a:xfrm>
+          <a:prstGeom prst="rect">
+            <a:avLst/>
+          </a:prstGeom>
+          <a:noFill/>
+          <a:ln/>
+        </p:spPr>
+        <p:txBody>
+          <a:bodyPr wrap="square" lIns="0" tIns="0" rIns="0" bIns="0" rtlCol="0" anchor="t"/>
+          <a:lstStyle/>
+          <a:p>
+            <a:pPr indent="0" marL="0">
+              <a:buNone/>
+            </a:pPr>
+            <a:r>
+              <a:rPr lang="en-US" sz="1000" dirty="0">
+                <a:solidFill>
+                  <a:srgbClr val="1B2B3A"/>
+                </a:solidFill>
+                <a:latin typeface="Meiryo" pitchFamily="34" charset="0"/>
+                <a:ea typeface="Meiryo" pitchFamily="34" charset="-122"/>
+                <a:cs typeface="Meiryo" pitchFamily="34" charset="-120"/>
+              </a:rPr>
+              <a:t>homepage に repo・take・as を書いて push。/&lt;名前&gt;/ が生える</a:t>
+            </a:r>
+            <a:endParaRPr lang="en-US" sz="1000" dirty="0"/>
+          </a:p>
+        </p:txBody>
+      </p:sp>
+      <p:sp>
+        <p:nvSpPr>
+          <p:cNvPr id="20" name="Shape 17"/>
+          <p:cNvSpPr/>
+          <p:nvPr/>
+        </p:nvSpPr>
+        <p:spPr>
+          <a:xfrm>
+            <a:off x="4663440" y="1417320"/>
+            <a:ext cx="4023360" cy="3154680"/>
+          </a:xfrm>
+          <a:prstGeom prst="rect">
+            <a:avLst/>
+          </a:prstGeom>
+          <a:solidFill>
+            <a:srgbClr val="FFFFFF"/>
+          </a:solidFill>
+          <a:ln w="12700">
+            <a:solidFill>
+              <a:srgbClr val="FFFFFF"/>
+            </a:solidFill>
+            <a:prstDash val="solid"/>
+          </a:ln>
+          <a:effectLst>
+            <a:outerShdw sx="100000" sy="100000" kx="0" ky="0" algn="bl" rotWithShape="0" blurRad="76200" dist="25400" dir="5400000">
+              <a:srgbClr val="000000">
+                <a:alpha val="12000"/>
+              </a:srgbClr>
+            </a:outerShdw>
+          </a:effectLst>
+        </p:spPr>
+        <p:txBody>
+          <a:bodyPr/>
+          <a:p/>
+        </p:txBody>
+      </p:sp>
+      <p:sp>
+        <p:nvSpPr>
+          <p:cNvPr id="21" name="Shape 18"/>
+          <p:cNvSpPr/>
+          <p:nvPr/>
+        </p:nvSpPr>
+        <p:spPr>
+          <a:xfrm>
+            <a:off x="4892040" y="1618488"/>
+            <a:ext cx="457200" cy="457200"/>
+          </a:xfrm>
+          <a:prstGeom prst="ellipse">
+            <a:avLst/>
+          </a:prstGeom>
+          <a:solidFill>
+            <a:srgbClr val="001E3C"/>
+          </a:solidFill>
+          <a:ln w="12700">
+            <a:solidFill>
+              <a:srgbClr val="001E3C"/>
+            </a:solidFill>
+            <a:prstDash val="solid"/>
+          </a:ln>
+        </p:spPr>
+        <p:txBody>
+          <a:bodyPr/>
+          <a:p/>
+        </p:txBody>
+      </p:sp>
+      <p:sp>
+        <p:nvSpPr>
+          <p:cNvPr id="23" name="Text 19"/>
+          <p:cNvSpPr txBox="1"/>
+          <p:nvPr/>
+        </p:nvSpPr>
+        <p:spPr>
+          <a:xfrm>
+            <a:off x="5486400" y="1618488"/>
+            <a:ext cx="3017520" cy="457200"/>
+          </a:xfrm>
+          <a:prstGeom prst="rect">
+            <a:avLst/>
+          </a:prstGeom>
+          <a:noFill/>
+          <a:ln/>
+        </p:spPr>
+        <p:txBody>
+          <a:bodyPr wrap="square" lIns="0" tIns="0" rIns="0" bIns="0" rtlCol="0" anchor="ctr"/>
+          <a:lstStyle/>
+          <a:p>
+            <a:pPr indent="0" marL="0">
+              <a:buNone/>
+            </a:pPr>
+            <a:r>
+              <a:rPr lang="en-US" sz="1400" b="1" dirty="0">
+                <a:solidFill>
+                  <a:srgbClr val="001E3C"/>
+                </a:solidFill>
+                <a:latin typeface="Meiryo" pitchFamily="34" charset="0"/>
+                <a:ea typeface="Meiryo" pitchFamily="34" charset="-122"/>
+                <a:cs typeface="Meiryo" pitchFamily="34" charset="-120"/>
+              </a:rPr>
+              <a:t>アプリができたら</a:t>
+            </a:r>
+            <a:endParaRPr lang="en-US" sz="1400" dirty="0"/>
+          </a:p>
+        </p:txBody>
+      </p:sp>
+      <p:sp>
+        <p:nvSpPr>
+          <p:cNvPr id="24" name="Shape 20"/>
+          <p:cNvSpPr/>
+          <p:nvPr/>
+        </p:nvSpPr>
+        <p:spPr>
+          <a:xfrm>
+            <a:off x="4892040" y="2286000"/>
+            <a:ext cx="310896" cy="310896"/>
+          </a:xfrm>
+          <a:prstGeom prst="ellipse">
+            <a:avLst/>
+          </a:prstGeom>
+          <a:solidFill>
+            <a:srgbClr val="001E3C"/>
+          </a:solidFill>
+          <a:ln w="12700">
+            <a:solidFill>
+              <a:srgbClr val="001E3C"/>
+            </a:solidFill>
+            <a:prstDash val="solid"/>
+          </a:ln>
+        </p:spPr>
+        <p:txBody>
+          <a:bodyPr/>
+          <a:p/>
+        </p:txBody>
+      </p:sp>
+      <p:sp>
+        <p:nvSpPr>
+          <p:cNvPr id="25" name="Text 21"/>
+          <p:cNvSpPr txBox="1"/>
+          <p:nvPr/>
+        </p:nvSpPr>
+        <p:spPr>
+          <a:xfrm>
+            <a:off x="4892040" y="2286000"/>
+            <a:ext cx="310896" cy="310896"/>
+          </a:xfrm>
+          <a:prstGeom prst="rect">
+            <a:avLst/>
+          </a:prstGeom>
+          <a:noFill/>
+          <a:ln/>
+        </p:spPr>
+        <p:txBody>
+          <a:bodyPr wrap="square" lIns="0" tIns="0" rIns="0" bIns="0" rtlCol="0" anchor="ctr"/>
+          <a:lstStyle/>
+          <a:p>
+            <a:pPr algn="ctr" indent="0" marL="0">
+              <a:buNone/>
+            </a:pPr>
+            <a:r>
+              <a:rPr lang="en-US" sz="1100" b="1" dirty="0">
+                <a:solidFill>
+                  <a:srgbClr val="FFFFFF"/>
+                </a:solidFill>
+                <a:latin typeface="Consolas" pitchFamily="34" charset="0"/>
+                <a:ea typeface="Consolas" pitchFamily="34" charset="-122"/>
+                <a:cs typeface="Consolas" pitchFamily="34" charset="-120"/>
+              </a:rPr>
+              <a:t>1</a:t>
+            </a:r>
+            <a:endParaRPr lang="en-US" sz="1100" dirty="0"/>
+          </a:p>
+        </p:txBody>
+      </p:sp>
+      <p:sp>
+        <p:nvSpPr>
+          <p:cNvPr id="26" name="Text 22"/>
+          <p:cNvSpPr txBox="1"/>
+          <p:nvPr/>
+        </p:nvSpPr>
+        <p:spPr>
+          <a:xfrm>
+            <a:off x="5330952" y="2295144"/>
+            <a:ext cx="3172968" cy="274320"/>
+          </a:xfrm>
+          <a:prstGeom prst="rect">
+            <a:avLst/>
+          </a:prstGeom>
+          <a:noFill/>
+          <a:ln/>
+        </p:spPr>
+        <p:txBody>
+          <a:bodyPr wrap="square" lIns="0" tIns="0" rIns="0" bIns="0" rtlCol="0" anchor="t"/>
+          <a:lstStyle/>
+          <a:p>
+            <a:pPr indent="0" marL="0">
+              <a:buNone/>
+            </a:pPr>
+            <a:r>
+              <a:rPr lang="en-US" sz="1200" b="1" dirty="0">
+                <a:solidFill>
+                  <a:srgbClr val="001E3C"/>
+                </a:solidFill>
+                <a:latin typeface="Meiryo" pitchFamily="34" charset="0"/>
+                <a:ea typeface="Meiryo" pitchFamily="34" charset="-122"/>
+                <a:cs typeface="Meiryo" pitchFamily="34" charset="-120"/>
+              </a:rPr>
+              <a:t>Webアプリの URL を入れる</a:t>
+            </a:r>
+            <a:endParaRPr lang="en-US" sz="1200" dirty="0"/>
+          </a:p>
+        </p:txBody>
+      </p:sp>
+      <p:sp>
+        <p:nvSpPr>
+          <p:cNvPr id="27" name="Text 23"/>
+          <p:cNvSpPr txBox="1"/>
+          <p:nvPr/>
+        </p:nvSpPr>
+        <p:spPr>
+          <a:xfrm>
+            <a:off x="5330952" y="2560320"/>
+            <a:ext cx="3172968" cy="512064"/>
+          </a:xfrm>
+          <a:prstGeom prst="rect">
+            <a:avLst/>
+          </a:prstGeom>
+          <a:noFill/>
+          <a:ln/>
+        </p:spPr>
+        <p:txBody>
+          <a:bodyPr wrap="square" lIns="0" tIns="0" rIns="0" bIns="0" rtlCol="0" anchor="t"/>
+          <a:lstStyle/>
+          <a:p>
+            <a:pPr indent="0" marL="0">
+              <a:buNone/>
+            </a:pPr>
+            <a:r>
+              <a:rPr lang="en-US" sz="1000" dirty="0">
+                <a:solidFill>
+                  <a:srgbClr val="1B2B3A"/>
+                </a:solidFill>
+                <a:latin typeface="Meiryo" pitchFamily="34" charset="0"/>
+                <a:ea typeface="Meiryo" pitchFamily="34" charset="-122"/>
+                <a:cs typeface="Meiryo" pitchFamily="34" charset="-120"/>
+              </a:rPr>
+              <a:t>/edit/ の WG紹介に。入れるまで誰も辿り着けない</a:t>
+            </a:r>
+            <a:endParaRPr lang="en-US" sz="1000" dirty="0"/>
+          </a:p>
+        </p:txBody>
+      </p:sp>
+      <p:sp>
+        <p:nvSpPr>
+          <p:cNvPr id="28" name="Shape 24"/>
+          <p:cNvSpPr/>
+          <p:nvPr/>
+        </p:nvSpPr>
+        <p:spPr>
+          <a:xfrm>
+            <a:off x="4892040" y="3090672"/>
+            <a:ext cx="310896" cy="310896"/>
+          </a:xfrm>
+          <a:prstGeom prst="ellipse">
+            <a:avLst/>
+          </a:prstGeom>
+          <a:solidFill>
+            <a:srgbClr val="001E3C"/>
+          </a:solidFill>
+          <a:ln w="12700">
+            <a:solidFill>
+              <a:srgbClr val="001E3C"/>
+            </a:solidFill>
+            <a:prstDash val="solid"/>
+          </a:ln>
+        </p:spPr>
+        <p:txBody>
+          <a:bodyPr/>
+          <a:p/>
+        </p:txBody>
+      </p:sp>
+      <p:sp>
+        <p:nvSpPr>
+          <p:cNvPr id="29" name="Text 25"/>
+          <p:cNvSpPr txBox="1"/>
+          <p:nvPr/>
+        </p:nvSpPr>
+        <p:spPr>
+          <a:xfrm>
+            <a:off x="4892040" y="3090672"/>
+            <a:ext cx="310896" cy="310896"/>
+          </a:xfrm>
+          <a:prstGeom prst="rect">
+            <a:avLst/>
+          </a:prstGeom>
+          <a:noFill/>
+          <a:ln/>
+        </p:spPr>
+        <p:txBody>
+          <a:bodyPr wrap="square" lIns="0" tIns="0" rIns="0" bIns="0" rtlCol="0" anchor="ctr"/>
+          <a:lstStyle/>
+          <a:p>
+            <a:pPr algn="ctr" indent="0" marL="0">
+              <a:buNone/>
+            </a:pPr>
+            <a:r>
+              <a:rPr lang="en-US" sz="1100" b="1" dirty="0">
+                <a:solidFill>
+                  <a:srgbClr val="FFFFFF"/>
+                </a:solidFill>
+                <a:latin typeface="Consolas" pitchFamily="34" charset="0"/>
+                <a:ea typeface="Consolas" pitchFamily="34" charset="-122"/>
+                <a:cs typeface="Consolas" pitchFamily="34" charset="-120"/>
+              </a:rPr>
+              <a:t>2</a:t>
+            </a:r>
+            <a:endParaRPr lang="en-US" sz="1100" dirty="0"/>
+          </a:p>
+        </p:txBody>
+      </p:sp>
+      <p:sp>
+        <p:nvSpPr>
+          <p:cNvPr id="30" name="Text 26"/>
+          <p:cNvSpPr txBox="1"/>
+          <p:nvPr/>
+        </p:nvSpPr>
+        <p:spPr>
+          <a:xfrm>
+            <a:off x="5330952" y="3099816"/>
+            <a:ext cx="3172968" cy="274320"/>
+          </a:xfrm>
+          <a:prstGeom prst="rect">
+            <a:avLst/>
+          </a:prstGeom>
+          <a:noFill/>
+          <a:ln/>
+        </p:spPr>
+        <p:txBody>
+          <a:bodyPr wrap="square" lIns="0" tIns="0" rIns="0" bIns="0" rtlCol="0" anchor="t"/>
+          <a:lstStyle/>
+          <a:p>
+            <a:pPr indent="0" marL="0">
+              <a:buNone/>
+            </a:pPr>
+            <a:r>
+              <a:rPr lang="en-US" sz="1200" b="1" dirty="0">
+                <a:solidFill>
+                  <a:srgbClr val="001E3C"/>
+                </a:solidFill>
+                <a:latin typeface="Meiryo" pitchFamily="34" charset="0"/>
+                <a:ea typeface="Meiryo" pitchFamily="34" charset="-122"/>
+                <a:cs typeface="Meiryo" pitchFamily="34" charset="-120"/>
+              </a:rPr>
+              <a:t>状態を「活動中」にする</a:t>
+            </a:r>
+            <a:endParaRPr lang="en-US" sz="1200" dirty="0"/>
+          </a:p>
+        </p:txBody>
+      </p:sp>
+      <p:sp>
+        <p:nvSpPr>
+          <p:cNvPr id="31" name="Text 27"/>
+          <p:cNvSpPr txBox="1"/>
+          <p:nvPr/>
+        </p:nvSpPr>
+        <p:spPr>
+          <a:xfrm>
+            <a:off x="5330952" y="3364992"/>
+            <a:ext cx="3172968" cy="512064"/>
+          </a:xfrm>
+          <a:prstGeom prst="rect">
+            <a:avLst/>
+          </a:prstGeom>
+          <a:noFill/>
+          <a:ln/>
+        </p:spPr>
+        <p:txBody>
+          <a:bodyPr wrap="square" lIns="0" tIns="0" rIns="0" bIns="0" rtlCol="0" anchor="t"/>
+          <a:lstStyle/>
+          <a:p>
+            <a:pPr indent="0" marL="0">
+              <a:buNone/>
+            </a:pPr>
+            <a:r>
+              <a:rPr lang="en-US" sz="1000" dirty="0">
+                <a:solidFill>
+                  <a:srgbClr val="1B2B3A"/>
+                </a:solidFill>
+                <a:latin typeface="Meiryo" pitchFamily="34" charset="0"/>
+                <a:ea typeface="Meiryo" pitchFamily="34" charset="-122"/>
+                <a:cs typeface="Meiryo" pitchFamily="34" charset="-120"/>
+              </a:rPr>
+              <a:t>「準備中」のままだと、作りかけに見える</a:t>
+            </a:r>
+            <a:endParaRPr lang="en-US" sz="1000" dirty="0"/>
+          </a:p>
+        </p:txBody>
+      </p:sp>
+      <p:sp>
+        <p:nvSpPr>
+          <p:cNvPr id="32" name="Shape 28"/>
+          <p:cNvSpPr/>
+          <p:nvPr/>
+        </p:nvSpPr>
+        <p:spPr>
+          <a:xfrm>
+            <a:off x="4892040" y="3895344"/>
+            <a:ext cx="310896" cy="310896"/>
+          </a:xfrm>
+          <a:prstGeom prst="ellipse">
+            <a:avLst/>
+          </a:prstGeom>
+          <a:solidFill>
+            <a:srgbClr val="001E3C"/>
+          </a:solidFill>
+          <a:ln w="12700">
+            <a:solidFill>
+              <a:srgbClr val="001E3C"/>
+            </a:solidFill>
+            <a:prstDash val="solid"/>
+          </a:ln>
+        </p:spPr>
+        <p:txBody>
+          <a:bodyPr/>
+          <a:p/>
+        </p:txBody>
+      </p:sp>
+      <p:sp>
+        <p:nvSpPr>
+          <p:cNvPr id="33" name="Text 29"/>
+          <p:cNvSpPr txBox="1"/>
+          <p:nvPr/>
+        </p:nvSpPr>
+        <p:spPr>
+          <a:xfrm>
+            <a:off x="4892040" y="3895344"/>
+            <a:ext cx="310896" cy="310896"/>
+          </a:xfrm>
+          <a:prstGeom prst="rect">
+            <a:avLst/>
+          </a:prstGeom>
+          <a:noFill/>
+          <a:ln/>
+        </p:spPr>
+        <p:txBody>
+          <a:bodyPr wrap="square" lIns="0" tIns="0" rIns="0" bIns="0" rtlCol="0" anchor="ctr"/>
+          <a:lstStyle/>
+          <a:p>
+            <a:pPr algn="ctr" indent="0" marL="0">
+              <a:buNone/>
+            </a:pPr>
+            <a:r>
+              <a:rPr lang="en-US" sz="1100" b="1" dirty="0">
+                <a:solidFill>
+                  <a:srgbClr val="FFFFFF"/>
+                </a:solidFill>
+                <a:latin typeface="Consolas" pitchFamily="34" charset="0"/>
+                <a:ea typeface="Consolas" pitchFamily="34" charset="-122"/>
+                <a:cs typeface="Consolas" pitchFamily="34" charset="-120"/>
+              </a:rPr>
+              <a:t>3</a:t>
+            </a:r>
+            <a:endParaRPr lang="en-US" sz="1100" dirty="0"/>
+          </a:p>
+        </p:txBody>
+      </p:sp>
+      <p:sp>
+        <p:nvSpPr>
+          <p:cNvPr id="34" name="Text 30"/>
+          <p:cNvSpPr txBox="1"/>
+          <p:nvPr/>
+        </p:nvSpPr>
+        <p:spPr>
+          <a:xfrm>
+            <a:off x="5330952" y="3904488"/>
+            <a:ext cx="3172968" cy="274320"/>
+          </a:xfrm>
+          <a:prstGeom prst="rect">
+            <a:avLst/>
+          </a:prstGeom>
+          <a:noFill/>
+          <a:ln/>
+        </p:spPr>
+        <p:txBody>
+          <a:bodyPr wrap="square" lIns="0" tIns="0" rIns="0" bIns="0" rtlCol="0" anchor="t"/>
+          <a:lstStyle/>
+          <a:p>
+            <a:pPr indent="0" marL="0">
+              <a:buNone/>
+            </a:pPr>
+            <a:r>
+              <a:rPr lang="en-US" sz="1200" b="1" dirty="0">
+                <a:solidFill>
+                  <a:srgbClr val="001E3C"/>
+                </a:solidFill>
+                <a:latin typeface="Meiryo" pitchFamily="34" charset="0"/>
+                <a:ea typeface="Meiryo" pitchFamily="34" charset="-122"/>
+                <a:cs typeface="Meiryo" pitchFamily="34" charset="-120"/>
+              </a:rPr>
+              <a:t>公表するときは works へ</a:t>
+            </a:r>
+            <a:endParaRPr lang="en-US" sz="1200" dirty="0"/>
+          </a:p>
+        </p:txBody>
+      </p:sp>
+      <p:sp>
+        <p:nvSpPr>
+          <p:cNvPr id="35" name="Text 31"/>
+          <p:cNvSpPr txBox="1"/>
+          <p:nvPr/>
+        </p:nvSpPr>
+        <p:spPr>
+          <a:xfrm>
+            <a:off x="5330952" y="4169664"/>
+            <a:ext cx="3172968" cy="512064"/>
+          </a:xfrm>
+          <a:prstGeom prst="rect">
+            <a:avLst/>
+          </a:prstGeom>
+          <a:noFill/>
+          <a:ln/>
+        </p:spPr>
+        <p:txBody>
+          <a:bodyPr wrap="square" lIns="0" tIns="0" rIns="0" bIns="0" rtlCol="0" anchor="t"/>
+          <a:lstStyle/>
+          <a:p>
+            <a:pPr indent="0" marL="0">
+              <a:buNone/>
+            </a:pPr>
+            <a:r>
+              <a:rPr lang="en-US" sz="1000" dirty="0">
+                <a:solidFill>
+                  <a:srgbClr val="1B2B3A"/>
+                </a:solidFill>
+                <a:latin typeface="Meiryo" pitchFamily="34" charset="0"/>
+                <a:ea typeface="Meiryo" pitchFamily="34" charset="-122"/>
+                <a:cs typeface="Meiryo" pitchFamily="34" charset="-120"/>
+              </a:rPr>
+              <a:t>wg-apps.yml の as を works に変える（URL はそのまま）</a:t>
+            </a:r>
+            <a:endParaRPr lang="en-US" sz="1000" dirty="0"/>
+          </a:p>
+        </p:txBody>
+      </p:sp>
+      <p:pic>
+        <p:nvPicPr>
+          <p:cNvPr id="36" name="Picture 35" descr="image.png"/>
+          <p:cNvPicPr>
+            <a:picLocks noChangeAspect="1"/>
+          </p:cNvPicPr>
+          <p:nvPr/>
+        </p:nvPicPr>
+        <p:blipFill>
+          <a:blip r:embed="rId5"/>
+          <a:stretch>
+            <a:fillRect/>
+          </a:stretch>
+        </p:blipFill>
+        <p:spPr>
+          <a:xfrm>
+            <a:off x="804672" y="1737360"/>
+            <a:ext cx="219456" cy="219456"/>
+          </a:xfrm>
+          <a:prstGeom prst="rect">
+            <a:avLst/>
+          </a:prstGeom>
+        </p:spPr>
+      </p:pic>
+      <p:pic>
+        <p:nvPicPr>
+          <p:cNvPr id="37" name="Picture 36" descr="image.png"/>
+          <p:cNvPicPr>
+            <a:picLocks noChangeAspect="1"/>
+          </p:cNvPicPr>
+          <p:nvPr/>
+        </p:nvPicPr>
+        <p:blipFill>
+          <a:blip r:embed="rId6"/>
+          <a:stretch>
+            <a:fillRect/>
+          </a:stretch>
+        </p:blipFill>
+        <p:spPr>
+          <a:xfrm>
+            <a:off x="5010912" y="1737360"/>
+            <a:ext cx="219456" cy="219456"/>
+          </a:xfrm>
+          <a:prstGeom prst="rect">
+            <a:avLst/>
+          </a:prstGeom>
+        </p:spPr>
+      </p:pic>
+    </p:spTree>
+  </p:cSld>
+  <p:clrMapOvr>
+    <a:masterClrMapping/>
+  </p:clrMapOvr>
+</p:sld>
+</file>
+
+<file path=ppt/slides/slide12.xml><?xml version="1.0" encoding="utf-8"?>
 <p:sld xmlns:a="http://schemas.openxmlformats.org/drawingml/2006/main" xmlns:r="http://schemas.openxmlformats.org/officeDocument/2006/relationships" xmlns:p="http://schemas.openxmlformats.org/presentationml/2006/main">
   <p:cSld name="Slide 11">
     <p:bg>
@@ -15056,7 +16299,7 @@
                 <a:ea typeface="Meiryo" pitchFamily="34" charset="-122"/>
                 <a:cs typeface="Meiryo" pitchFamily="34" charset="-120"/>
               </a:rPr>
-              <a:t>アプリを止める</a:t>
+              <a:t>公開を止める</a:t>
             </a:r>
             <a:endParaRPr lang="en-US" sz="1200" dirty="0"/>
           </a:p>
@@ -15095,7 +16338,7 @@
                 <a:ea typeface="Meiryo" pitchFamily="34" charset="-122"/>
                 <a:cs typeface="Meiryo" pitchFamily="34" charset="-120"/>
               </a:rPr>
-              <a:t>動かす場所ができてから。RG ごと削除する</a:t>
+              <a:t>homepage の wg-apps.yml から外す。次のデプロイで消える</a:t>
             </a:r>
             <a:endParaRPr lang="en-US" sz="1000" dirty="0"/>
           </a:p>

--- a/static/guide/01_リポジトリの作り方と運用.pptx
+++ b/static/guide/01_リポジトリの作り方と運用.pptx
@@ -2559,7 +2559,7 @@
                 <a:ea typeface="Meiryo" pitchFamily="34" charset="-122"/>
                 <a:cs typeface="Meiryo" pitchFamily="34" charset="-120"/>
               </a:rPr>
-              <a:t>全員・毎日</a:t>
+              <a:t>全員</a:t>
             </a:r>
             <a:endParaRPr lang="en-US" sz="900" dirty="0"/>
           </a:p>

--- a/static/guide/01_リポジトリの作り方と運用.pptx
+++ b/static/guide/01_リポジトリの作り方と運用.pptx
@@ -1392,10 +1392,8 @@
           <a:lstStyle/>
           <a:p>
             <a:r>
-              <a:rPr lang="en-US" dirty="0"/>
-              <a:t>メンバーは佛教大学の学生なので、卒業で入れ替わります。GitHub は学生かどうかを確かめないので、外し忘れると卒業後も書き込めるままになります。アーカイブしたリポジトリは読み取り専用で残り、あとから元に戻せます。</a:t>
-            </a:r>
-            <a:endParaRPr lang="en-US" dirty="0"/>
+              <a:t>WG のアプリを載せるときの登録です。GitHub App をそのリポジトリにも入れ、起動用のシークレットを 2 つ置き、homepage の wg-apps.yml に 1 行足します。ここまでやって、はじめて取り込みの対象になります。手順の細かいところは homepage の deploy.txt にあります。</a:t>
+            </a:r>
           </a:p>
         </p:txBody>
       </p:sp>
@@ -5171,6 +5169,45 @@
           </a:prstGeom>
         </p:spPr>
       </p:pic>
+      <p:sp>
+        <p:nvSpPr>
+          <p:cNvPr id="19" name="Text 14"/>
+          <p:cNvSpPr txBox="1"/>
+          <p:nvPr/>
+        </p:nvSpPr>
+        <p:spPr>
+          <a:xfrm>
+            <a:off x="457200" y="4681728"/>
+            <a:ext cx="8229600" cy="365760"/>
+          </a:xfrm>
+          <a:prstGeom prst="rect">
+            <a:avLst/>
+          </a:prstGeom>
+          <a:noFill/>
+          <a:ln/>
+        </p:spPr>
+        <p:txBody>
+          <a:bodyPr wrap="square" lIns="0" tIns="0" rIns="0" bIns="0" rtlCol="0" anchor="t"/>
+          <a:lstStyle/>
+          <a:p>
+            <a:pPr indent="0" marL="0">
+              <a:buNone/>
+            </a:pPr>
+            <a:r>
+              <a:rPr lang="en-US" sz="1050" dirty="0">
+                <a:solidFill>
+                  <a:srgbClr val="5A6B7B"/>
+                </a:solidFill>
+                <a:latin typeface="Meiryo" pitchFamily="34" charset="0"/>
+                <a:ea typeface="Meiryo" pitchFamily="34" charset="-122"/>
+                <a:cs typeface="Meiryo" pitchFamily="34" charset="-120"/>
+              </a:rPr>
+              <a:t>登録するまでは取り込まれない。WG が main にマージしても、サイトには出ない（homepage が作り直されるだけ）。</a:t>
+            </a:r>
+            <a:endParaRPr lang="en-US" sz="1050" dirty="0"/>
+          </a:p>
+        </p:txBody>
+      </p:sp>
     </p:spTree>
   </p:cSld>
   <p:clrMapOvr>

--- a/static/guide/01_リポジトリの作り方と運用.pptx
+++ b/static/guide/01_リポジトリの作り方と運用.pptx
@@ -1392,7 +1392,7 @@
           <a:lstStyle/>
           <a:p>
             <a:r>
-              <a:t>WG のアプリを載せるときの登録です。GitHub App をそのリポジトリにも入れ、起動用のシークレットを 2 つ置き、homepage の wg-apps.yml に 1 行足します。ここまでやって、はじめて取り込みの対象になります。手順の細かいところは homepage の deploy.txt にあります。</a:t>
+              <a:t>WG のアプリを載せるときの登録です。GitHub 側は 3 つ——アプリ（GitHub App funitclub-wg-deploy）をそのリポジトリに入れ、App ID を HOMEPAGE_DEPLOY_APP_ID に、新しく作った .pem の中身を HOMEPAGE_DEPLOY_PRIVATE_KEY に登録します。鍵は作ったときだけ表示されるので、登録したら手元のファイルは消します。homepage 側は wg-apps.yml への 1 行で、ここまでやって取り込みの対象になります。細かい手順は homepage の deploy.txt にあります。</a:t>
             </a:r>
           </a:p>
         </p:txBody>
@@ -4135,7 +4135,7 @@
                 <a:ea typeface="Meiryo" pitchFamily="34" charset="-122"/>
                 <a:cs typeface="Meiryo" pitchFamily="34" charset="-120"/>
               </a:rPr>
-              <a:t>一度だけ（WG ごと）</a:t>
+              <a:t>GitHub でやること（一度だけ）</a:t>
             </a:r>
             <a:endParaRPr lang="en-US" sz="1400" dirty="0"/>
           </a:p>
@@ -4242,7 +4242,7 @@
                 <a:ea typeface="Meiryo" pitchFamily="34" charset="-122"/>
                 <a:cs typeface="Meiryo" pitchFamily="34" charset="-120"/>
               </a:rPr>
-              <a:t>GitHub App をこのリポジトリにも入れる</a:t>
+              <a:t>アプリを入れる</a:t>
             </a:r>
             <a:endParaRPr lang="en-US" sz="1200" dirty="0"/>
           </a:p>
@@ -4281,7 +4281,7 @@
                 <a:ea typeface="Meiryo" pitchFamily="34" charset="-122"/>
                 <a:cs typeface="Meiryo" pitchFamily="34" charset="-120"/>
               </a:rPr>
-              <a:t>App の「Install App」→「Only select repositories」に足す</a:t>
+              <a:t>「Install App」→「Only select repositories」に wg-&lt;名前&gt; を足す</a:t>
             </a:r>
             <a:endParaRPr lang="en-US" sz="1000" dirty="0"/>
           </a:p>
@@ -4388,7 +4388,7 @@
                 <a:ea typeface="Meiryo" pitchFamily="34" charset="-122"/>
                 <a:cs typeface="Meiryo" pitchFamily="34" charset="-120"/>
               </a:rPr>
-              <a:t>シークレットを 2 つ入れる</a:t>
+              <a:t>アプリの登録</a:t>
             </a:r>
             <a:endParaRPr lang="en-US" sz="1200" dirty="0"/>
           </a:p>
@@ -4427,7 +4427,7 @@
                 <a:ea typeface="Meiryo" pitchFamily="34" charset="-122"/>
                 <a:cs typeface="Meiryo" pitchFamily="34" charset="-120"/>
               </a:rPr>
-              <a:t>鍵を作り、HOMEPAGE_DEPLOY_APP_ID と _PRIVATE_KEY を入れる</a:t>
+              <a:t>WG の Secrets に HOMEPAGE_DEPLOY_APP_ID（App ID の数字）</a:t>
             </a:r>
             <a:endParaRPr lang="en-US" sz="1000" dirty="0"/>
           </a:p>
@@ -4534,7 +4534,7 @@
                 <a:ea typeface="Meiryo" pitchFamily="34" charset="-122"/>
                 <a:cs typeface="Meiryo" pitchFamily="34" charset="-120"/>
               </a:rPr>
-              <a:t>wg-apps.yml に 1 行足す</a:t>
+              <a:t>pem の登録</a:t>
             </a:r>
             <a:endParaRPr lang="en-US" sz="1200" dirty="0"/>
           </a:p>
@@ -4573,7 +4573,7 @@
                 <a:ea typeface="Meiryo" pitchFamily="34" charset="-122"/>
                 <a:cs typeface="Meiryo" pitchFamily="34" charset="-120"/>
               </a:rPr>
-              <a:t>homepage に repo・take・as を書いて push。/&lt;名前&gt;/ が生える</a:t>
+              <a:t>「Credentials」→「New key」で作った .pem を HOMEPAGE_DEPLOY_PRIVATE_KEY に</a:t>
             </a:r>
             <a:endParaRPr lang="en-US" sz="1000" dirty="0"/>
           </a:p>
@@ -4677,7 +4677,7 @@
                 <a:ea typeface="Meiryo" pitchFamily="34" charset="-122"/>
                 <a:cs typeface="Meiryo" pitchFamily="34" charset="-120"/>
               </a:rPr>
-              <a:t>アプリができたら</a:t>
+              <a:t>homepage でやること</a:t>
             </a:r>
             <a:endParaRPr lang="en-US" sz="1400" dirty="0"/>
           </a:p>
@@ -4784,7 +4784,7 @@
                 <a:ea typeface="Meiryo" pitchFamily="34" charset="-122"/>
                 <a:cs typeface="Meiryo" pitchFamily="34" charset="-120"/>
               </a:rPr>
-              <a:t>Webアプリの URL を入れる</a:t>
+              <a:t>wg-apps.yml に 1 行足す</a:t>
             </a:r>
             <a:endParaRPr lang="en-US" sz="1200" dirty="0"/>
           </a:p>
@@ -4823,7 +4823,7 @@
                 <a:ea typeface="Meiryo" pitchFamily="34" charset="-122"/>
                 <a:cs typeface="Meiryo" pitchFamily="34" charset="-120"/>
               </a:rPr>
-              <a:t>/edit/ の WG紹介に。入れるまで誰も辿り着けない</a:t>
+              <a:t>repo・take・as を書いて push。これで /&lt;名前&gt;/ が生える</a:t>
             </a:r>
             <a:endParaRPr lang="en-US" sz="1000" dirty="0"/>
           </a:p>
@@ -4930,7 +4930,7 @@
                 <a:ea typeface="Meiryo" pitchFamily="34" charset="-122"/>
                 <a:cs typeface="Meiryo" pitchFamily="34" charset="-120"/>
               </a:rPr>
-              <a:t>状態を「活動中」にする</a:t>
+              <a:t>Webアプリの URL を入れる</a:t>
             </a:r>
             <a:endParaRPr lang="en-US" sz="1200" dirty="0"/>
           </a:p>
@@ -4969,7 +4969,7 @@
                 <a:ea typeface="Meiryo" pitchFamily="34" charset="-122"/>
                 <a:cs typeface="Meiryo" pitchFamily="34" charset="-120"/>
               </a:rPr>
-              <a:t>「準備中」のままだと、作りかけに見える</a:t>
+              <a:t>アプリができたら /edit/ の WG紹介に入れ、状態を「活動中」に。入れるまで誰も辿り着けない</a:t>
             </a:r>
             <a:endParaRPr lang="en-US" sz="1000" dirty="0"/>
           </a:p>
@@ -5202,7 +5202,7 @@
                 <a:ea typeface="Meiryo" pitchFamily="34" charset="-122"/>
                 <a:cs typeface="Meiryo" pitchFamily="34" charset="-120"/>
               </a:rPr>
-              <a:t>登録するまでは取り込まれない。WG が main にマージしても、サイトには出ない（homepage が作り直されるだけ）。</a:t>
+              <a:t>登録するまでは取り込まれない（WG がマージしても、サイトには出ない）。鍵は作ったときだけ表示されるので、登録したら手元の .pem は消す。</a:t>
             </a:r>
             <a:endParaRPr lang="en-US" sz="1050" dirty="0"/>
           </a:p>

--- a/static/guide/01_リポジトリの作り方と運用.pptx
+++ b/static/guide/01_リポジトリの作り方と運用.pptx
@@ -16,6 +16,7 @@
     <p:sldId id="264" r:id="rId10"/>
     <p:sldId id="265" r:id="rId11"/>
     <p:sldId id="267" r:id="rId18"/>
+    <p:sldId id="268" r:id="rId19"/>
     <p:sldId id="266" r:id="rId12"/>
   </p:sldIdLst>
   <p:notesMasterIdLst>
@@ -1392,7 +1393,7 @@
           <a:lstStyle/>
           <a:p>
             <a:r>
-              <a:t>WG のアプリを載せるときの登録です。GitHub 側は 3 つ——アプリ（GitHub App funitclub-wg-deploy）をそのリポジトリに入れ、App ID を HOMEPAGE_DEPLOY_APP_ID に、新しく作った .pem の中身を HOMEPAGE_DEPLOY_PRIVATE_KEY に登録します。鍵は作ったときだけ表示されるので、登録したら手元のファイルは消します。homepage 側は wg-apps.yml への 1 行で、ここまでやって取り込みの対象になります。細かい手順は homepage の deploy.txt にあります。</a:t>
+              <a:t>homepage 側の登録と、できたかの確かめ方です。wg-apps.yml に 1 行足して push すると、次のデプロイから取り込まれます。アプリができたら /edit/ で URL を入れ、状態を「活動中」に。公表のときは as を works に変えるだけで、URL は変わりません。確かめるときは、WG の Actions（10 秒ほどで緑）と homepage の Actions（5〜9 分）の両方を見ます。</a:t>
             </a:r>
           </a:p>
         </p:txBody>
@@ -3992,7 +3993,7 @@
                 <a:ea typeface="Consolas" pitchFamily="34" charset="-122"/>
                 <a:cs typeface="Consolas" pitchFamily="34" charset="-120"/>
               </a:rPr>
-              <a:t>// 01  ·  公開  ·  登録</a:t>
+              <a:t>// 01  ·  公開  ·  登録 ①</a:t>
             </a:r>
             <a:endParaRPr lang="en-US" sz="1100" dirty="0"/>
           </a:p>
@@ -4031,7 +4032,7 @@
                 <a:ea typeface="Meiryo" pitchFamily="34" charset="-122"/>
                 <a:cs typeface="Meiryo" pitchFamily="34" charset="-120"/>
               </a:rPr>
-              <a:t>アプリを載せるときの登録</a:t>
+              <a:t>GitHub でやること（WG ごと一度だけ）</a:t>
             </a:r>
             <a:endParaRPr lang="en-US" sz="2600" dirty="0"/>
           </a:p>
@@ -4135,7 +4136,7 @@
                 <a:ea typeface="Meiryo" pitchFamily="34" charset="-122"/>
                 <a:cs typeface="Meiryo" pitchFamily="34" charset="-120"/>
               </a:rPr>
-              <a:t>GitHub でやること（一度だけ）</a:t>
+              <a:t>アプリをこのリポジトリに入れる</a:t>
             </a:r>
             <a:endParaRPr lang="en-US" sz="1400" dirty="0"/>
           </a:p>
@@ -4242,7 +4243,7 @@
                 <a:ea typeface="Meiryo" pitchFamily="34" charset="-122"/>
                 <a:cs typeface="Meiryo" pitchFamily="34" charset="-120"/>
               </a:rPr>
-              <a:t>アプリを入れる</a:t>
+              <a:t>org の設定を開く</a:t>
             </a:r>
             <a:endParaRPr lang="en-US" sz="1200" dirty="0"/>
           </a:p>
@@ -4281,7 +4282,7 @@
                 <a:ea typeface="Meiryo" pitchFamily="34" charset="-122"/>
                 <a:cs typeface="Meiryo" pitchFamily="34" charset="-120"/>
               </a:rPr>
-              <a:t>「Install App」→「Only select repositories」に wg-&lt;名前&gt; を足す</a:t>
+              <a:t>github.com/funITclub →「Settings」→ 左の下「Developer settings」</a:t>
             </a:r>
             <a:endParaRPr lang="en-US" sz="1000" dirty="0"/>
           </a:p>
@@ -4388,7 +4389,7 @@
                 <a:ea typeface="Meiryo" pitchFamily="34" charset="-122"/>
                 <a:cs typeface="Meiryo" pitchFamily="34" charset="-120"/>
               </a:rPr>
-              <a:t>アプリの登録</a:t>
+              <a:t>App の設定に入る</a:t>
             </a:r>
             <a:endParaRPr lang="en-US" sz="1200" dirty="0"/>
           </a:p>
@@ -4427,7 +4428,7 @@
                 <a:ea typeface="Meiryo" pitchFamily="34" charset="-122"/>
                 <a:cs typeface="Meiryo" pitchFamily="34" charset="-120"/>
               </a:rPr>
-              <a:t>WG の Secrets に HOMEPAGE_DEPLOY_APP_ID（App ID の数字）</a:t>
+              <a:t>「GitHub Apps」→ funitclub-wg-deploy の「Edit」</a:t>
             </a:r>
             <a:endParaRPr lang="en-US" sz="1000" dirty="0"/>
           </a:p>
@@ -4534,7 +4535,7 @@
                 <a:ea typeface="Meiryo" pitchFamily="34" charset="-122"/>
                 <a:cs typeface="Meiryo" pitchFamily="34" charset="-120"/>
               </a:rPr>
-              <a:t>pem の登録</a:t>
+              <a:t>リポジトリを足す</a:t>
             </a:r>
             <a:endParaRPr lang="en-US" sz="1200" dirty="0"/>
           </a:p>
@@ -4573,7 +4574,7 @@
                 <a:ea typeface="Meiryo" pitchFamily="34" charset="-122"/>
                 <a:cs typeface="Meiryo" pitchFamily="34" charset="-120"/>
               </a:rPr>
-              <a:t>「Credentials」→「New key」で作った .pem を HOMEPAGE_DEPLOY_PRIVATE_KEY に</a:t>
+              <a:t>左の「Install App」→ funITclub の歯車 →「Select repositories」→ 保存</a:t>
             </a:r>
             <a:endParaRPr lang="en-US" sz="1000" dirty="0"/>
           </a:p>
@@ -4677,7 +4678,7 @@
                 <a:ea typeface="Meiryo" pitchFamily="34" charset="-122"/>
                 <a:cs typeface="Meiryo" pitchFamily="34" charset="-120"/>
               </a:rPr>
-              <a:t>homepage でやること</a:t>
+              <a:t>鍵とシークレットを登録する</a:t>
             </a:r>
             <a:endParaRPr lang="en-US" sz="1400" dirty="0"/>
           </a:p>
@@ -4784,7 +4785,7 @@
                 <a:ea typeface="Meiryo" pitchFamily="34" charset="-122"/>
                 <a:cs typeface="Meiryo" pitchFamily="34" charset="-120"/>
               </a:rPr>
-              <a:t>wg-apps.yml に 1 行足す</a:t>
+              <a:t>pem を作る</a:t>
             </a:r>
             <a:endParaRPr lang="en-US" sz="1200" dirty="0"/>
           </a:p>
@@ -4823,7 +4824,7 @@
                 <a:ea typeface="Meiryo" pitchFamily="34" charset="-122"/>
                 <a:cs typeface="Meiryo" pitchFamily="34" charset="-120"/>
               </a:rPr>
-              <a:t>repo・take・as を書いて push。これで /&lt;名前&gt;/ が生える</a:t>
+              <a:t>App の左「Credentials」→「Key pairs」→「New key」。この時だけ落とせる</a:t>
             </a:r>
             <a:endParaRPr lang="en-US" sz="1000" dirty="0"/>
           </a:p>
@@ -4930,7 +4931,7 @@
                 <a:ea typeface="Meiryo" pitchFamily="34" charset="-122"/>
                 <a:cs typeface="Meiryo" pitchFamily="34" charset="-120"/>
               </a:rPr>
-              <a:t>Webアプリの URL を入れる</a:t>
+              <a:t>アプリの登録</a:t>
             </a:r>
             <a:endParaRPr lang="en-US" sz="1200" dirty="0"/>
           </a:p>
@@ -4969,7 +4970,7 @@
                 <a:ea typeface="Meiryo" pitchFamily="34" charset="-122"/>
                 <a:cs typeface="Meiryo" pitchFamily="34" charset="-120"/>
               </a:rPr>
-              <a:t>アプリができたら /edit/ の WG紹介に入れ、状態を「活動中」に。入れるまで誰も辿り着けない</a:t>
+              <a:t>WG の「Settings」→「Secrets and variables」→「Actions」→ HOMEPAGE_DEPLOY_APP_ID</a:t>
             </a:r>
             <a:endParaRPr lang="en-US" sz="1000" dirty="0"/>
           </a:p>
@@ -5076,7 +5077,7 @@
                 <a:ea typeface="Meiryo" pitchFamily="34" charset="-122"/>
                 <a:cs typeface="Meiryo" pitchFamily="34" charset="-120"/>
               </a:rPr>
-              <a:t>公表するときは works へ</a:t>
+              <a:t>pem の登録</a:t>
             </a:r>
             <a:endParaRPr lang="en-US" sz="1200" dirty="0"/>
           </a:p>
@@ -5115,7 +5116,7 @@
                 <a:ea typeface="Meiryo" pitchFamily="34" charset="-122"/>
                 <a:cs typeface="Meiryo" pitchFamily="34" charset="-120"/>
               </a:rPr>
-              <a:t>wg-apps.yml の as を works に変える（URL はそのまま）</a:t>
+              <a:t>同じ画面で HOMEPAGE_DEPLOY_PRIVATE_KEY に .pem の中身。入れたら消す</a:t>
             </a:r>
             <a:endParaRPr lang="en-US" sz="1000" dirty="0"/>
           </a:p>
@@ -5145,6 +5146,45 @@
           </a:prstGeom>
         </p:spPr>
       </p:pic>
+      <p:sp>
+        <p:nvSpPr>
+          <p:cNvPr id="19" name="Text 14"/>
+          <p:cNvSpPr txBox="1"/>
+          <p:nvPr/>
+        </p:nvSpPr>
+        <p:spPr>
+          <a:xfrm>
+            <a:off x="457200" y="4681728"/>
+            <a:ext cx="8229600" cy="365760"/>
+          </a:xfrm>
+          <a:prstGeom prst="rect">
+            <a:avLst/>
+          </a:prstGeom>
+          <a:noFill/>
+          <a:ln/>
+        </p:spPr>
+        <p:txBody>
+          <a:bodyPr wrap="square" lIns="0" tIns="0" rIns="0" bIns="0" rtlCol="0" anchor="t"/>
+          <a:lstStyle/>
+          <a:p>
+            <a:pPr indent="0" marL="0">
+              <a:buNone/>
+            </a:pPr>
+            <a:r>
+              <a:rPr lang="en-US" sz="1050" dirty="0">
+                <a:solidFill>
+                  <a:srgbClr val="5A6B7B"/>
+                </a:solidFill>
+                <a:latin typeface="Meiryo" pitchFamily="34" charset="0"/>
+                <a:ea typeface="Meiryo" pitchFamily="34" charset="-122"/>
+                <a:cs typeface="Meiryo" pitchFamily="34" charset="-120"/>
+              </a:rPr>
+              <a:t>App ID は App の「General」に出ている数字。鍵は作ったときだけ表示されるので、登録したら手元の .pem は消す。</a:t>
+            </a:r>
+            <a:endParaRPr lang="en-US" sz="1050" dirty="0"/>
+          </a:p>
+        </p:txBody>
+      </p:sp>
       <p:pic>
         <p:nvPicPr>
           <p:cNvPr id="37" name="Picture 36" descr="image.png"/>
@@ -5154,7 +5194,7 @@
           <p:nvPr/>
         </p:nvPicPr>
         <p:blipFill>
-          <a:blip r:embed="rId6"/>
+          <a:blip r:embed="rId8"/>
           <a:stretch>
             <a:fillRect/>
           </a:stretch>
@@ -5169,45 +5209,6 @@
           </a:prstGeom>
         </p:spPr>
       </p:pic>
-      <p:sp>
-        <p:nvSpPr>
-          <p:cNvPr id="19" name="Text 14"/>
-          <p:cNvSpPr txBox="1"/>
-          <p:nvPr/>
-        </p:nvSpPr>
-        <p:spPr>
-          <a:xfrm>
-            <a:off x="457200" y="4681728"/>
-            <a:ext cx="8229600" cy="365760"/>
-          </a:xfrm>
-          <a:prstGeom prst="rect">
-            <a:avLst/>
-          </a:prstGeom>
-          <a:noFill/>
-          <a:ln/>
-        </p:spPr>
-        <p:txBody>
-          <a:bodyPr wrap="square" lIns="0" tIns="0" rIns="0" bIns="0" rtlCol="0" anchor="t"/>
-          <a:lstStyle/>
-          <a:p>
-            <a:pPr indent="0" marL="0">
-              <a:buNone/>
-            </a:pPr>
-            <a:r>
-              <a:rPr lang="en-US" sz="1050" dirty="0">
-                <a:solidFill>
-                  <a:srgbClr val="5A6B7B"/>
-                </a:solidFill>
-                <a:latin typeface="Meiryo" pitchFamily="34" charset="0"/>
-                <a:ea typeface="Meiryo" pitchFamily="34" charset="-122"/>
-                <a:cs typeface="Meiryo" pitchFamily="34" charset="-120"/>
-              </a:rPr>
-              <a:t>登録するまでは取り込まれない（WG がマージしても、サイトには出ない）。鍵は作ったときだけ表示されるので、登録したら手元の .pem は消す。</a:t>
-            </a:r>
-            <a:endParaRPr lang="en-US" sz="1050" dirty="0"/>
-          </a:p>
-        </p:txBody>
-      </p:sp>
     </p:spTree>
   </p:cSld>
   <p:clrMapOvr>
@@ -5217,6 +5218,1287 @@
 </file>
 
 <file path=ppt/slides/slide12.xml><?xml version="1.0" encoding="utf-8"?>
+<p:sld xmlns:a="http://schemas.openxmlformats.org/drawingml/2006/main" xmlns:p="http://schemas.openxmlformats.org/presentationml/2006/main" xmlns:r="http://schemas.openxmlformats.org/officeDocument/2006/relationships">
+  <p:cSld name="Slide 9">
+    <p:bg>
+      <p:bgPr>
+        <a:solidFill>
+          <a:srgbClr val="F2F5F8"/>
+        </a:solidFill>
+      </p:bgPr>
+    </p:bg>
+    <p:spTree>
+      <p:nvGrpSpPr>
+        <p:cNvPr id="1" name=""/>
+        <p:cNvGrpSpPr/>
+        <p:nvPr/>
+      </p:nvGrpSpPr>
+      <p:grpSpPr>
+        <a:xfrm>
+          <a:off x="0" y="0"/>
+          <a:ext cx="0" cy="0"/>
+          <a:chOff x="0" y="0"/>
+          <a:chExt cx="0" cy="0"/>
+        </a:xfrm>
+      </p:grpSpPr>
+      <p:sp>
+        <p:nvSpPr>
+          <p:cNvPr id="2" name="Text 0"/>
+          <p:cNvSpPr txBox="1"/>
+          <p:nvPr/>
+        </p:nvSpPr>
+        <p:spPr>
+          <a:xfrm>
+            <a:off x="457200" y="320040"/>
+            <a:ext cx="6858000" cy="274320"/>
+          </a:xfrm>
+          <a:prstGeom prst="rect">
+            <a:avLst/>
+          </a:prstGeom>
+          <a:noFill/>
+          <a:ln/>
+        </p:spPr>
+        <p:txBody>
+          <a:bodyPr wrap="square" lIns="0" tIns="0" rIns="0" bIns="0" rtlCol="0" anchor="t"/>
+          <a:lstStyle/>
+          <a:p>
+            <a:pPr indent="0" marL="0">
+              <a:buNone/>
+            </a:pPr>
+            <a:r>
+              <a:rPr lang="en-US" sz="1100" dirty="0">
+                <a:solidFill>
+                  <a:srgbClr val="1A4A70"/>
+                </a:solidFill>
+                <a:latin typeface="Consolas" pitchFamily="34" charset="0"/>
+                <a:ea typeface="Consolas" pitchFamily="34" charset="-122"/>
+                <a:cs typeface="Consolas" pitchFamily="34" charset="-120"/>
+              </a:rPr>
+              <a:t>// 01  ·  公開  ·  登録 ②</a:t>
+            </a:r>
+            <a:endParaRPr lang="en-US" sz="1100" dirty="0"/>
+          </a:p>
+        </p:txBody>
+      </p:sp>
+      <p:sp>
+        <p:nvSpPr>
+          <p:cNvPr id="3" name="Text 1"/>
+          <p:cNvSpPr txBox="1"/>
+          <p:nvPr/>
+        </p:nvSpPr>
+        <p:spPr>
+          <a:xfrm>
+            <a:off x="457200" y="594360"/>
+            <a:ext cx="8229600" cy="594360"/>
+          </a:xfrm>
+          <a:prstGeom prst="rect">
+            <a:avLst/>
+          </a:prstGeom>
+          <a:noFill/>
+          <a:ln/>
+        </p:spPr>
+        <p:txBody>
+          <a:bodyPr wrap="square" lIns="0" tIns="0" rIns="0" bIns="0" rtlCol="0" anchor="ctr"/>
+          <a:lstStyle/>
+          <a:p>
+            <a:pPr indent="0" marL="0">
+              <a:buNone/>
+            </a:pPr>
+            <a:r>
+              <a:rPr lang="en-US" sz="2600" b="1" dirty="0">
+                <a:solidFill>
+                  <a:srgbClr val="001E3C"/>
+                </a:solidFill>
+                <a:latin typeface="Meiryo" pitchFamily="34" charset="0"/>
+                <a:ea typeface="Meiryo" pitchFamily="34" charset="-122"/>
+                <a:cs typeface="Meiryo" pitchFamily="34" charset="-120"/>
+              </a:rPr>
+              <a:t>homepage でやること・確かめ方</a:t>
+            </a:r>
+            <a:endParaRPr lang="en-US" sz="2600" dirty="0"/>
+          </a:p>
+        </p:txBody>
+      </p:sp>
+      <p:sp>
+        <p:nvSpPr>
+          <p:cNvPr id="4" name="Shape 2"/>
+          <p:cNvSpPr/>
+          <p:nvPr/>
+        </p:nvSpPr>
+        <p:spPr>
+          <a:xfrm>
+            <a:off x="457200" y="1417320"/>
+            <a:ext cx="4023360" cy="3154680"/>
+          </a:xfrm>
+          <a:prstGeom prst="rect">
+            <a:avLst/>
+          </a:prstGeom>
+          <a:solidFill>
+            <a:srgbClr val="FFFFFF"/>
+          </a:solidFill>
+          <a:ln w="12700">
+            <a:solidFill>
+              <a:srgbClr val="FFFFFF"/>
+            </a:solidFill>
+            <a:prstDash val="solid"/>
+          </a:ln>
+          <a:effectLst>
+            <a:outerShdw sx="100000" sy="100000" kx="0" ky="0" algn="bl" rotWithShape="0" blurRad="76200" dist="25400" dir="5400000">
+              <a:srgbClr val="000000">
+                <a:alpha val="12000"/>
+              </a:srgbClr>
+            </a:outerShdw>
+          </a:effectLst>
+        </p:spPr>
+        <p:txBody>
+          <a:bodyPr/>
+          <a:p/>
+        </p:txBody>
+      </p:sp>
+      <p:sp>
+        <p:nvSpPr>
+          <p:cNvPr id="5" name="Shape 3"/>
+          <p:cNvSpPr/>
+          <p:nvPr/>
+        </p:nvSpPr>
+        <p:spPr>
+          <a:xfrm>
+            <a:off x="685800" y="1618488"/>
+            <a:ext cx="457200" cy="457200"/>
+          </a:xfrm>
+          <a:prstGeom prst="ellipse">
+            <a:avLst/>
+          </a:prstGeom>
+          <a:solidFill>
+            <a:srgbClr val="5BB8FF"/>
+          </a:solidFill>
+          <a:ln w="12700">
+            <a:solidFill>
+              <a:srgbClr val="5BB8FF"/>
+            </a:solidFill>
+            <a:prstDash val="solid"/>
+          </a:ln>
+        </p:spPr>
+        <p:txBody>
+          <a:bodyPr/>
+          <a:p/>
+        </p:txBody>
+      </p:sp>
+      <p:sp>
+        <p:nvSpPr>
+          <p:cNvPr id="7" name="Text 4"/>
+          <p:cNvSpPr txBox="1"/>
+          <p:nvPr/>
+        </p:nvSpPr>
+        <p:spPr>
+          <a:xfrm>
+            <a:off x="1280160" y="1618488"/>
+            <a:ext cx="3017520" cy="457200"/>
+          </a:xfrm>
+          <a:prstGeom prst="rect">
+            <a:avLst/>
+          </a:prstGeom>
+          <a:noFill/>
+          <a:ln/>
+        </p:spPr>
+        <p:txBody>
+          <a:bodyPr wrap="square" lIns="0" tIns="0" rIns="0" bIns="0" rtlCol="0" anchor="ctr"/>
+          <a:lstStyle/>
+          <a:p>
+            <a:pPr indent="0" marL="0">
+              <a:buNone/>
+            </a:pPr>
+            <a:r>
+              <a:rPr lang="en-US" sz="1400" b="1" dirty="0">
+                <a:solidFill>
+                  <a:srgbClr val="001E3C"/>
+                </a:solidFill>
+                <a:latin typeface="Meiryo" pitchFamily="34" charset="0"/>
+                <a:ea typeface="Meiryo" pitchFamily="34" charset="-122"/>
+                <a:cs typeface="Meiryo" pitchFamily="34" charset="-120"/>
+              </a:rPr>
+              <a:t>homepage でやること</a:t>
+            </a:r>
+            <a:endParaRPr lang="en-US" sz="1400" dirty="0"/>
+          </a:p>
+        </p:txBody>
+      </p:sp>
+      <p:sp>
+        <p:nvSpPr>
+          <p:cNvPr id="8" name="Shape 5"/>
+          <p:cNvSpPr/>
+          <p:nvPr/>
+        </p:nvSpPr>
+        <p:spPr>
+          <a:xfrm>
+            <a:off x="685800" y="2286000"/>
+            <a:ext cx="310896" cy="310896"/>
+          </a:xfrm>
+          <a:prstGeom prst="ellipse">
+            <a:avLst/>
+          </a:prstGeom>
+          <a:solidFill>
+            <a:srgbClr val="001E3C"/>
+          </a:solidFill>
+          <a:ln w="12700">
+            <a:solidFill>
+              <a:srgbClr val="001E3C"/>
+            </a:solidFill>
+            <a:prstDash val="solid"/>
+          </a:ln>
+        </p:spPr>
+        <p:txBody>
+          <a:bodyPr/>
+          <a:p/>
+        </p:txBody>
+      </p:sp>
+      <p:sp>
+        <p:nvSpPr>
+          <p:cNvPr id="9" name="Text 6"/>
+          <p:cNvSpPr txBox="1"/>
+          <p:nvPr/>
+        </p:nvSpPr>
+        <p:spPr>
+          <a:xfrm>
+            <a:off x="685800" y="2286000"/>
+            <a:ext cx="310896" cy="310896"/>
+          </a:xfrm>
+          <a:prstGeom prst="rect">
+            <a:avLst/>
+          </a:prstGeom>
+          <a:noFill/>
+          <a:ln/>
+        </p:spPr>
+        <p:txBody>
+          <a:bodyPr wrap="square" lIns="0" tIns="0" rIns="0" bIns="0" rtlCol="0" anchor="ctr"/>
+          <a:lstStyle/>
+          <a:p>
+            <a:pPr algn="ctr" indent="0" marL="0">
+              <a:buNone/>
+            </a:pPr>
+            <a:r>
+              <a:rPr lang="en-US" sz="1100" b="1" dirty="0">
+                <a:solidFill>
+                  <a:srgbClr val="FFFFFF"/>
+                </a:solidFill>
+                <a:latin typeface="Consolas" pitchFamily="34" charset="0"/>
+                <a:ea typeface="Consolas" pitchFamily="34" charset="-122"/>
+                <a:cs typeface="Consolas" pitchFamily="34" charset="-120"/>
+              </a:rPr>
+              <a:t>1</a:t>
+            </a:r>
+            <a:endParaRPr lang="en-US" sz="1100" dirty="0"/>
+          </a:p>
+        </p:txBody>
+      </p:sp>
+      <p:sp>
+        <p:nvSpPr>
+          <p:cNvPr id="10" name="Text 7"/>
+          <p:cNvSpPr txBox="1"/>
+          <p:nvPr/>
+        </p:nvSpPr>
+        <p:spPr>
+          <a:xfrm>
+            <a:off x="1124712" y="2295144"/>
+            <a:ext cx="3172968" cy="274320"/>
+          </a:xfrm>
+          <a:prstGeom prst="rect">
+            <a:avLst/>
+          </a:prstGeom>
+          <a:noFill/>
+          <a:ln/>
+        </p:spPr>
+        <p:txBody>
+          <a:bodyPr wrap="square" lIns="0" tIns="0" rIns="0" bIns="0" rtlCol="0" anchor="t"/>
+          <a:lstStyle/>
+          <a:p>
+            <a:pPr indent="0" marL="0">
+              <a:buNone/>
+            </a:pPr>
+            <a:r>
+              <a:rPr lang="en-US" sz="1200" b="1" dirty="0">
+                <a:solidFill>
+                  <a:srgbClr val="001E3C"/>
+                </a:solidFill>
+                <a:latin typeface="Meiryo" pitchFamily="34" charset="0"/>
+                <a:ea typeface="Meiryo" pitchFamily="34" charset="-122"/>
+                <a:cs typeface="Meiryo" pitchFamily="34" charset="-120"/>
+              </a:rPr>
+              <a:t>wg-apps.yml に 1 行足す</a:t>
+            </a:r>
+            <a:endParaRPr lang="en-US" sz="1200" dirty="0"/>
+          </a:p>
+        </p:txBody>
+      </p:sp>
+      <p:sp>
+        <p:nvSpPr>
+          <p:cNvPr id="11" name="Text 8"/>
+          <p:cNvSpPr txBox="1"/>
+          <p:nvPr/>
+        </p:nvSpPr>
+        <p:spPr>
+          <a:xfrm>
+            <a:off x="1124712" y="2560320"/>
+            <a:ext cx="3172968" cy="512064"/>
+          </a:xfrm>
+          <a:prstGeom prst="rect">
+            <a:avLst/>
+          </a:prstGeom>
+          <a:noFill/>
+          <a:ln/>
+        </p:spPr>
+        <p:txBody>
+          <a:bodyPr wrap="square" lIns="0" tIns="0" rIns="0" bIns="0" rtlCol="0" anchor="t"/>
+          <a:lstStyle/>
+          <a:p>
+            <a:pPr indent="0" marL="0">
+              <a:buNone/>
+            </a:pPr>
+            <a:r>
+              <a:rPr lang="en-US" sz="1000" dirty="0">
+                <a:solidFill>
+                  <a:srgbClr val="1B2B3A"/>
+                </a:solidFill>
+                <a:latin typeface="Meiryo" pitchFamily="34" charset="0"/>
+                <a:ea typeface="Meiryo" pitchFamily="34" charset="-122"/>
+                <a:cs typeface="Meiryo" pitchFamily="34" charset="-120"/>
+              </a:rPr>
+              <a:t>repo・take・as を書いて push。これで /&lt;名前&gt;/ が生える</a:t>
+            </a:r>
+            <a:endParaRPr lang="en-US" sz="1000" dirty="0"/>
+          </a:p>
+        </p:txBody>
+      </p:sp>
+      <p:sp>
+        <p:nvSpPr>
+          <p:cNvPr id="12" name="Shape 9"/>
+          <p:cNvSpPr/>
+          <p:nvPr/>
+        </p:nvSpPr>
+        <p:spPr>
+          <a:xfrm>
+            <a:off x="685800" y="3090672"/>
+            <a:ext cx="310896" cy="310896"/>
+          </a:xfrm>
+          <a:prstGeom prst="ellipse">
+            <a:avLst/>
+          </a:prstGeom>
+          <a:solidFill>
+            <a:srgbClr val="001E3C"/>
+          </a:solidFill>
+          <a:ln w="12700">
+            <a:solidFill>
+              <a:srgbClr val="001E3C"/>
+            </a:solidFill>
+            <a:prstDash val="solid"/>
+          </a:ln>
+        </p:spPr>
+        <p:txBody>
+          <a:bodyPr/>
+          <a:p/>
+        </p:txBody>
+      </p:sp>
+      <p:sp>
+        <p:nvSpPr>
+          <p:cNvPr id="13" name="Text 10"/>
+          <p:cNvSpPr txBox="1"/>
+          <p:nvPr/>
+        </p:nvSpPr>
+        <p:spPr>
+          <a:xfrm>
+            <a:off x="685800" y="3090672"/>
+            <a:ext cx="310896" cy="310896"/>
+          </a:xfrm>
+          <a:prstGeom prst="rect">
+            <a:avLst/>
+          </a:prstGeom>
+          <a:noFill/>
+          <a:ln/>
+        </p:spPr>
+        <p:txBody>
+          <a:bodyPr wrap="square" lIns="0" tIns="0" rIns="0" bIns="0" rtlCol="0" anchor="ctr"/>
+          <a:lstStyle/>
+          <a:p>
+            <a:pPr algn="ctr" indent="0" marL="0">
+              <a:buNone/>
+            </a:pPr>
+            <a:r>
+              <a:rPr lang="en-US" sz="1100" b="1" dirty="0">
+                <a:solidFill>
+                  <a:srgbClr val="FFFFFF"/>
+                </a:solidFill>
+                <a:latin typeface="Consolas" pitchFamily="34" charset="0"/>
+                <a:ea typeface="Consolas" pitchFamily="34" charset="-122"/>
+                <a:cs typeface="Consolas" pitchFamily="34" charset="-120"/>
+              </a:rPr>
+              <a:t>2</a:t>
+            </a:r>
+            <a:endParaRPr lang="en-US" sz="1100" dirty="0"/>
+          </a:p>
+        </p:txBody>
+      </p:sp>
+      <p:sp>
+        <p:nvSpPr>
+          <p:cNvPr id="14" name="Text 11"/>
+          <p:cNvSpPr txBox="1"/>
+          <p:nvPr/>
+        </p:nvSpPr>
+        <p:spPr>
+          <a:xfrm>
+            <a:off x="1124712" y="3099816"/>
+            <a:ext cx="3172968" cy="274320"/>
+          </a:xfrm>
+          <a:prstGeom prst="rect">
+            <a:avLst/>
+          </a:prstGeom>
+          <a:noFill/>
+          <a:ln/>
+        </p:spPr>
+        <p:txBody>
+          <a:bodyPr wrap="square" lIns="0" tIns="0" rIns="0" bIns="0" rtlCol="0" anchor="t"/>
+          <a:lstStyle/>
+          <a:p>
+            <a:pPr indent="0" marL="0">
+              <a:buNone/>
+            </a:pPr>
+            <a:r>
+              <a:rPr lang="en-US" sz="1200" b="1" dirty="0">
+                <a:solidFill>
+                  <a:srgbClr val="001E3C"/>
+                </a:solidFill>
+                <a:latin typeface="Meiryo" pitchFamily="34" charset="0"/>
+                <a:ea typeface="Meiryo" pitchFamily="34" charset="-122"/>
+                <a:cs typeface="Meiryo" pitchFamily="34" charset="-120"/>
+              </a:rPr>
+              <a:t>Webアプリの URL を入れる</a:t>
+            </a:r>
+            <a:endParaRPr lang="en-US" sz="1200" dirty="0"/>
+          </a:p>
+        </p:txBody>
+      </p:sp>
+      <p:sp>
+        <p:nvSpPr>
+          <p:cNvPr id="15" name="Text 12"/>
+          <p:cNvSpPr txBox="1"/>
+          <p:nvPr/>
+        </p:nvSpPr>
+        <p:spPr>
+          <a:xfrm>
+            <a:off x="1124712" y="3364992"/>
+            <a:ext cx="3172968" cy="512064"/>
+          </a:xfrm>
+          <a:prstGeom prst="rect">
+            <a:avLst/>
+          </a:prstGeom>
+          <a:noFill/>
+          <a:ln/>
+        </p:spPr>
+        <p:txBody>
+          <a:bodyPr wrap="square" lIns="0" tIns="0" rIns="0" bIns="0" rtlCol="0" anchor="t"/>
+          <a:lstStyle/>
+          <a:p>
+            <a:pPr indent="0" marL="0">
+              <a:buNone/>
+            </a:pPr>
+            <a:r>
+              <a:rPr lang="en-US" sz="1000" dirty="0">
+                <a:solidFill>
+                  <a:srgbClr val="1B2B3A"/>
+                </a:solidFill>
+                <a:latin typeface="Meiryo" pitchFamily="34" charset="0"/>
+                <a:ea typeface="Meiryo" pitchFamily="34" charset="-122"/>
+                <a:cs typeface="Meiryo" pitchFamily="34" charset="-120"/>
+              </a:rPr>
+              <a:t>アプリができたら /edit/ の WG紹介に。状態も「活動中」にする</a:t>
+            </a:r>
+            <a:endParaRPr lang="en-US" sz="1000" dirty="0"/>
+          </a:p>
+        </p:txBody>
+      </p:sp>
+      <p:sp>
+        <p:nvSpPr>
+          <p:cNvPr id="16" name="Shape 13"/>
+          <p:cNvSpPr/>
+          <p:nvPr/>
+        </p:nvSpPr>
+        <p:spPr>
+          <a:xfrm>
+            <a:off x="685800" y="3895344"/>
+            <a:ext cx="310896" cy="310896"/>
+          </a:xfrm>
+          <a:prstGeom prst="ellipse">
+            <a:avLst/>
+          </a:prstGeom>
+          <a:solidFill>
+            <a:srgbClr val="001E3C"/>
+          </a:solidFill>
+          <a:ln w="12700">
+            <a:solidFill>
+              <a:srgbClr val="001E3C"/>
+            </a:solidFill>
+            <a:prstDash val="solid"/>
+          </a:ln>
+        </p:spPr>
+        <p:txBody>
+          <a:bodyPr/>
+          <a:p/>
+        </p:txBody>
+      </p:sp>
+      <p:sp>
+        <p:nvSpPr>
+          <p:cNvPr id="17" name="Text 14"/>
+          <p:cNvSpPr txBox="1"/>
+          <p:nvPr/>
+        </p:nvSpPr>
+        <p:spPr>
+          <a:xfrm>
+            <a:off x="685800" y="3895344"/>
+            <a:ext cx="310896" cy="310896"/>
+          </a:xfrm>
+          <a:prstGeom prst="rect">
+            <a:avLst/>
+          </a:prstGeom>
+          <a:noFill/>
+          <a:ln/>
+        </p:spPr>
+        <p:txBody>
+          <a:bodyPr wrap="square" lIns="0" tIns="0" rIns="0" bIns="0" rtlCol="0" anchor="ctr"/>
+          <a:lstStyle/>
+          <a:p>
+            <a:pPr algn="ctr" indent="0" marL="0">
+              <a:buNone/>
+            </a:pPr>
+            <a:r>
+              <a:rPr lang="en-US" sz="1100" b="1" dirty="0">
+                <a:solidFill>
+                  <a:srgbClr val="FFFFFF"/>
+                </a:solidFill>
+                <a:latin typeface="Consolas" pitchFamily="34" charset="0"/>
+                <a:ea typeface="Consolas" pitchFamily="34" charset="-122"/>
+                <a:cs typeface="Consolas" pitchFamily="34" charset="-120"/>
+              </a:rPr>
+              <a:t>3</a:t>
+            </a:r>
+            <a:endParaRPr lang="en-US" sz="1100" dirty="0"/>
+          </a:p>
+        </p:txBody>
+      </p:sp>
+      <p:sp>
+        <p:nvSpPr>
+          <p:cNvPr id="18" name="Text 15"/>
+          <p:cNvSpPr txBox="1"/>
+          <p:nvPr/>
+        </p:nvSpPr>
+        <p:spPr>
+          <a:xfrm>
+            <a:off x="1124712" y="3904488"/>
+            <a:ext cx="3172968" cy="274320"/>
+          </a:xfrm>
+          <a:prstGeom prst="rect">
+            <a:avLst/>
+          </a:prstGeom>
+          <a:noFill/>
+          <a:ln/>
+        </p:spPr>
+        <p:txBody>
+          <a:bodyPr wrap="square" lIns="0" tIns="0" rIns="0" bIns="0" rtlCol="0" anchor="t"/>
+          <a:lstStyle/>
+          <a:p>
+            <a:pPr indent="0" marL="0">
+              <a:buNone/>
+            </a:pPr>
+            <a:r>
+              <a:rPr lang="en-US" sz="1200" b="1" dirty="0">
+                <a:solidFill>
+                  <a:srgbClr val="001E3C"/>
+                </a:solidFill>
+                <a:latin typeface="Meiryo" pitchFamily="34" charset="0"/>
+                <a:ea typeface="Meiryo" pitchFamily="34" charset="-122"/>
+                <a:cs typeface="Meiryo" pitchFamily="34" charset="-120"/>
+              </a:rPr>
+              <a:t>公表するときは works へ</a:t>
+            </a:r>
+            <a:endParaRPr lang="en-US" sz="1200" dirty="0"/>
+          </a:p>
+        </p:txBody>
+      </p:sp>
+      <p:sp>
+        <p:nvSpPr>
+          <p:cNvPr id="19" name="Text 16"/>
+          <p:cNvSpPr txBox="1"/>
+          <p:nvPr/>
+        </p:nvSpPr>
+        <p:spPr>
+          <a:xfrm>
+            <a:off x="1124712" y="4169664"/>
+            <a:ext cx="3172968" cy="512064"/>
+          </a:xfrm>
+          <a:prstGeom prst="rect">
+            <a:avLst/>
+          </a:prstGeom>
+          <a:noFill/>
+          <a:ln/>
+        </p:spPr>
+        <p:txBody>
+          <a:bodyPr wrap="square" lIns="0" tIns="0" rIns="0" bIns="0" rtlCol="0" anchor="t"/>
+          <a:lstStyle/>
+          <a:p>
+            <a:pPr indent="0" marL="0">
+              <a:buNone/>
+            </a:pPr>
+            <a:r>
+              <a:rPr lang="en-US" sz="1000" dirty="0">
+                <a:solidFill>
+                  <a:srgbClr val="1B2B3A"/>
+                </a:solidFill>
+                <a:latin typeface="Meiryo" pitchFamily="34" charset="0"/>
+                <a:ea typeface="Meiryo" pitchFamily="34" charset="-122"/>
+                <a:cs typeface="Meiryo" pitchFamily="34" charset="-120"/>
+              </a:rPr>
+              <a:t>wg-apps.yml の as を works に変える（URL はそのまま）</a:t>
+            </a:r>
+            <a:endParaRPr lang="en-US" sz="1000" dirty="0"/>
+          </a:p>
+        </p:txBody>
+      </p:sp>
+      <p:sp>
+        <p:nvSpPr>
+          <p:cNvPr id="20" name="Shape 17"/>
+          <p:cNvSpPr/>
+          <p:nvPr/>
+        </p:nvSpPr>
+        <p:spPr>
+          <a:xfrm>
+            <a:off x="4663440" y="1417320"/>
+            <a:ext cx="4023360" cy="3154680"/>
+          </a:xfrm>
+          <a:prstGeom prst="rect">
+            <a:avLst/>
+          </a:prstGeom>
+          <a:solidFill>
+            <a:srgbClr val="FFFFFF"/>
+          </a:solidFill>
+          <a:ln w="12700">
+            <a:solidFill>
+              <a:srgbClr val="FFFFFF"/>
+            </a:solidFill>
+            <a:prstDash val="solid"/>
+          </a:ln>
+          <a:effectLst>
+            <a:outerShdw sx="100000" sy="100000" kx="0" ky="0" algn="bl" rotWithShape="0" blurRad="76200" dist="25400" dir="5400000">
+              <a:srgbClr val="000000">
+                <a:alpha val="12000"/>
+              </a:srgbClr>
+            </a:outerShdw>
+          </a:effectLst>
+        </p:spPr>
+        <p:txBody>
+          <a:bodyPr/>
+          <a:p/>
+        </p:txBody>
+      </p:sp>
+      <p:sp>
+        <p:nvSpPr>
+          <p:cNvPr id="21" name="Shape 18"/>
+          <p:cNvSpPr/>
+          <p:nvPr/>
+        </p:nvSpPr>
+        <p:spPr>
+          <a:xfrm>
+            <a:off x="4892040" y="1618488"/>
+            <a:ext cx="457200" cy="457200"/>
+          </a:xfrm>
+          <a:prstGeom prst="ellipse">
+            <a:avLst/>
+          </a:prstGeom>
+          <a:solidFill>
+            <a:srgbClr val="001E3C"/>
+          </a:solidFill>
+          <a:ln w="12700">
+            <a:solidFill>
+              <a:srgbClr val="001E3C"/>
+            </a:solidFill>
+            <a:prstDash val="solid"/>
+          </a:ln>
+        </p:spPr>
+        <p:txBody>
+          <a:bodyPr/>
+          <a:p/>
+        </p:txBody>
+      </p:sp>
+      <p:sp>
+        <p:nvSpPr>
+          <p:cNvPr id="23" name="Text 19"/>
+          <p:cNvSpPr txBox="1"/>
+          <p:nvPr/>
+        </p:nvSpPr>
+        <p:spPr>
+          <a:xfrm>
+            <a:off x="5486400" y="1618488"/>
+            <a:ext cx="3017520" cy="457200"/>
+          </a:xfrm>
+          <a:prstGeom prst="rect">
+            <a:avLst/>
+          </a:prstGeom>
+          <a:noFill/>
+          <a:ln/>
+        </p:spPr>
+        <p:txBody>
+          <a:bodyPr wrap="square" lIns="0" tIns="0" rIns="0" bIns="0" rtlCol="0" anchor="ctr"/>
+          <a:lstStyle/>
+          <a:p>
+            <a:pPr indent="0" marL="0">
+              <a:buNone/>
+            </a:pPr>
+            <a:r>
+              <a:rPr lang="en-US" sz="1400" b="1" dirty="0">
+                <a:solidFill>
+                  <a:srgbClr val="001E3C"/>
+                </a:solidFill>
+                <a:latin typeface="Meiryo" pitchFamily="34" charset="0"/>
+                <a:ea typeface="Meiryo" pitchFamily="34" charset="-122"/>
+                <a:cs typeface="Meiryo" pitchFamily="34" charset="-120"/>
+              </a:rPr>
+              <a:t>できたか確かめる</a:t>
+            </a:r>
+            <a:endParaRPr lang="en-US" sz="1400" dirty="0"/>
+          </a:p>
+        </p:txBody>
+      </p:sp>
+      <p:sp>
+        <p:nvSpPr>
+          <p:cNvPr id="24" name="Shape 20"/>
+          <p:cNvSpPr/>
+          <p:nvPr/>
+        </p:nvSpPr>
+        <p:spPr>
+          <a:xfrm>
+            <a:off x="4892040" y="2286000"/>
+            <a:ext cx="310896" cy="310896"/>
+          </a:xfrm>
+          <a:prstGeom prst="ellipse">
+            <a:avLst/>
+          </a:prstGeom>
+          <a:solidFill>
+            <a:srgbClr val="001E3C"/>
+          </a:solidFill>
+          <a:ln w="12700">
+            <a:solidFill>
+              <a:srgbClr val="001E3C"/>
+            </a:solidFill>
+            <a:prstDash val="solid"/>
+          </a:ln>
+        </p:spPr>
+        <p:txBody>
+          <a:bodyPr/>
+          <a:p/>
+        </p:txBody>
+      </p:sp>
+      <p:sp>
+        <p:nvSpPr>
+          <p:cNvPr id="25" name="Text 21"/>
+          <p:cNvSpPr txBox="1"/>
+          <p:nvPr/>
+        </p:nvSpPr>
+        <p:spPr>
+          <a:xfrm>
+            <a:off x="4892040" y="2286000"/>
+            <a:ext cx="310896" cy="310896"/>
+          </a:xfrm>
+          <a:prstGeom prst="rect">
+            <a:avLst/>
+          </a:prstGeom>
+          <a:noFill/>
+          <a:ln/>
+        </p:spPr>
+        <p:txBody>
+          <a:bodyPr wrap="square" lIns="0" tIns="0" rIns="0" bIns="0" rtlCol="0" anchor="ctr"/>
+          <a:lstStyle/>
+          <a:p>
+            <a:pPr algn="ctr" indent="0" marL="0">
+              <a:buNone/>
+            </a:pPr>
+            <a:r>
+              <a:rPr lang="en-US" sz="1100" b="1" dirty="0">
+                <a:solidFill>
+                  <a:srgbClr val="FFFFFF"/>
+                </a:solidFill>
+                <a:latin typeface="Consolas" pitchFamily="34" charset="0"/>
+                <a:ea typeface="Consolas" pitchFamily="34" charset="-122"/>
+                <a:cs typeface="Consolas" pitchFamily="34" charset="-120"/>
+              </a:rPr>
+              <a:t>1</a:t>
+            </a:r>
+            <a:endParaRPr lang="en-US" sz="1100" dirty="0"/>
+          </a:p>
+        </p:txBody>
+      </p:sp>
+      <p:sp>
+        <p:nvSpPr>
+          <p:cNvPr id="26" name="Text 22"/>
+          <p:cNvSpPr txBox="1"/>
+          <p:nvPr/>
+        </p:nvSpPr>
+        <p:spPr>
+          <a:xfrm>
+            <a:off x="5330952" y="2295144"/>
+            <a:ext cx="3172968" cy="274320"/>
+          </a:xfrm>
+          <a:prstGeom prst="rect">
+            <a:avLst/>
+          </a:prstGeom>
+          <a:noFill/>
+          <a:ln/>
+        </p:spPr>
+        <p:txBody>
+          <a:bodyPr wrap="square" lIns="0" tIns="0" rIns="0" bIns="0" rtlCol="0" anchor="t"/>
+          <a:lstStyle/>
+          <a:p>
+            <a:pPr indent="0" marL="0">
+              <a:buNone/>
+            </a:pPr>
+            <a:r>
+              <a:rPr lang="en-US" sz="1200" b="1" dirty="0">
+                <a:solidFill>
+                  <a:srgbClr val="001E3C"/>
+                </a:solidFill>
+                <a:latin typeface="Meiryo" pitchFamily="34" charset="0"/>
+                <a:ea typeface="Meiryo" pitchFamily="34" charset="-122"/>
+                <a:cs typeface="Meiryo" pitchFamily="34" charset="-120"/>
+              </a:rPr>
+              <a:t>WG の Actions</a:t>
+            </a:r>
+            <a:endParaRPr lang="en-US" sz="1200" dirty="0"/>
+          </a:p>
+        </p:txBody>
+      </p:sp>
+      <p:sp>
+        <p:nvSpPr>
+          <p:cNvPr id="27" name="Text 23"/>
+          <p:cNvSpPr txBox="1"/>
+          <p:nvPr/>
+        </p:nvSpPr>
+        <p:spPr>
+          <a:xfrm>
+            <a:off x="5330952" y="2560320"/>
+            <a:ext cx="3172968" cy="512064"/>
+          </a:xfrm>
+          <a:prstGeom prst="rect">
+            <a:avLst/>
+          </a:prstGeom>
+          <a:noFill/>
+          <a:ln/>
+        </p:spPr>
+        <p:txBody>
+          <a:bodyPr wrap="square" lIns="0" tIns="0" rIns="0" bIns="0" rtlCol="0" anchor="t"/>
+          <a:lstStyle/>
+          <a:p>
+            <a:pPr indent="0" marL="0">
+              <a:buNone/>
+            </a:pPr>
+            <a:r>
+              <a:rPr lang="en-US" sz="1000" dirty="0">
+                <a:solidFill>
+                  <a:srgbClr val="1B2B3A"/>
+                </a:solidFill>
+                <a:latin typeface="Meiryo" pitchFamily="34" charset="0"/>
+                <a:ea typeface="Meiryo" pitchFamily="34" charset="-122"/>
+                <a:cs typeface="Meiryo" pitchFamily="34" charset="-120"/>
+              </a:rPr>
+              <a:t>マージの 10 秒後に緑。homepage のデプロイを呼べたということ</a:t>
+            </a:r>
+            <a:endParaRPr lang="en-US" sz="1000" dirty="0"/>
+          </a:p>
+        </p:txBody>
+      </p:sp>
+      <p:sp>
+        <p:nvSpPr>
+          <p:cNvPr id="28" name="Shape 24"/>
+          <p:cNvSpPr/>
+          <p:nvPr/>
+        </p:nvSpPr>
+        <p:spPr>
+          <a:xfrm>
+            <a:off x="4892040" y="3090672"/>
+            <a:ext cx="310896" cy="310896"/>
+          </a:xfrm>
+          <a:prstGeom prst="ellipse">
+            <a:avLst/>
+          </a:prstGeom>
+          <a:solidFill>
+            <a:srgbClr val="001E3C"/>
+          </a:solidFill>
+          <a:ln w="12700">
+            <a:solidFill>
+              <a:srgbClr val="001E3C"/>
+            </a:solidFill>
+            <a:prstDash val="solid"/>
+          </a:ln>
+        </p:spPr>
+        <p:txBody>
+          <a:bodyPr/>
+          <a:p/>
+        </p:txBody>
+      </p:sp>
+      <p:sp>
+        <p:nvSpPr>
+          <p:cNvPr id="29" name="Text 25"/>
+          <p:cNvSpPr txBox="1"/>
+          <p:nvPr/>
+        </p:nvSpPr>
+        <p:spPr>
+          <a:xfrm>
+            <a:off x="4892040" y="3090672"/>
+            <a:ext cx="310896" cy="310896"/>
+          </a:xfrm>
+          <a:prstGeom prst="rect">
+            <a:avLst/>
+          </a:prstGeom>
+          <a:noFill/>
+          <a:ln/>
+        </p:spPr>
+        <p:txBody>
+          <a:bodyPr wrap="square" lIns="0" tIns="0" rIns="0" bIns="0" rtlCol="0" anchor="ctr"/>
+          <a:lstStyle/>
+          <a:p>
+            <a:pPr algn="ctr" indent="0" marL="0">
+              <a:buNone/>
+            </a:pPr>
+            <a:r>
+              <a:rPr lang="en-US" sz="1100" b="1" dirty="0">
+                <a:solidFill>
+                  <a:srgbClr val="FFFFFF"/>
+                </a:solidFill>
+                <a:latin typeface="Consolas" pitchFamily="34" charset="0"/>
+                <a:ea typeface="Consolas" pitchFamily="34" charset="-122"/>
+                <a:cs typeface="Consolas" pitchFamily="34" charset="-120"/>
+              </a:rPr>
+              <a:t>2</a:t>
+            </a:r>
+            <a:endParaRPr lang="en-US" sz="1100" dirty="0"/>
+          </a:p>
+        </p:txBody>
+      </p:sp>
+      <p:sp>
+        <p:nvSpPr>
+          <p:cNvPr id="30" name="Text 26"/>
+          <p:cNvSpPr txBox="1"/>
+          <p:nvPr/>
+        </p:nvSpPr>
+        <p:spPr>
+          <a:xfrm>
+            <a:off x="5330952" y="3099816"/>
+            <a:ext cx="3172968" cy="274320"/>
+          </a:xfrm>
+          <a:prstGeom prst="rect">
+            <a:avLst/>
+          </a:prstGeom>
+          <a:noFill/>
+          <a:ln/>
+        </p:spPr>
+        <p:txBody>
+          <a:bodyPr wrap="square" lIns="0" tIns="0" rIns="0" bIns="0" rtlCol="0" anchor="t"/>
+          <a:lstStyle/>
+          <a:p>
+            <a:pPr indent="0" marL="0">
+              <a:buNone/>
+            </a:pPr>
+            <a:r>
+              <a:rPr lang="en-US" sz="1200" b="1" dirty="0">
+                <a:solidFill>
+                  <a:srgbClr val="001E3C"/>
+                </a:solidFill>
+                <a:latin typeface="Meiryo" pitchFamily="34" charset="0"/>
+                <a:ea typeface="Meiryo" pitchFamily="34" charset="-122"/>
+                <a:cs typeface="Meiryo" pitchFamily="34" charset="-120"/>
+              </a:rPr>
+              <a:t>homepage の Actions</a:t>
+            </a:r>
+            <a:endParaRPr lang="en-US" sz="1200" dirty="0"/>
+          </a:p>
+        </p:txBody>
+      </p:sp>
+      <p:sp>
+        <p:nvSpPr>
+          <p:cNvPr id="31" name="Text 27"/>
+          <p:cNvSpPr txBox="1"/>
+          <p:nvPr/>
+        </p:nvSpPr>
+        <p:spPr>
+          <a:xfrm>
+            <a:off x="5330952" y="3364992"/>
+            <a:ext cx="3172968" cy="512064"/>
+          </a:xfrm>
+          <a:prstGeom prst="rect">
+            <a:avLst/>
+          </a:prstGeom>
+          <a:noFill/>
+          <a:ln/>
+        </p:spPr>
+        <p:txBody>
+          <a:bodyPr wrap="square" lIns="0" tIns="0" rIns="0" bIns="0" rtlCol="0" anchor="t"/>
+          <a:lstStyle/>
+          <a:p>
+            <a:pPr indent="0" marL="0">
+              <a:buNone/>
+            </a:pPr>
+            <a:r>
+              <a:rPr lang="en-US" sz="1000" dirty="0">
+                <a:solidFill>
+                  <a:srgbClr val="1B2B3A"/>
+                </a:solidFill>
+                <a:latin typeface="Meiryo" pitchFamily="34" charset="0"/>
+                <a:ea typeface="Meiryo" pitchFamily="34" charset="-122"/>
+                <a:cs typeface="Meiryo" pitchFamily="34" charset="-120"/>
+              </a:rPr>
+              <a:t>5〜9 分で緑。ここが赤いときは公開されていない</a:t>
+            </a:r>
+            <a:endParaRPr lang="en-US" sz="1000" dirty="0"/>
+          </a:p>
+        </p:txBody>
+      </p:sp>
+      <p:sp>
+        <p:nvSpPr>
+          <p:cNvPr id="32" name="Shape 28"/>
+          <p:cNvSpPr/>
+          <p:nvPr/>
+        </p:nvSpPr>
+        <p:spPr>
+          <a:xfrm>
+            <a:off x="4892040" y="3895344"/>
+            <a:ext cx="310896" cy="310896"/>
+          </a:xfrm>
+          <a:prstGeom prst="ellipse">
+            <a:avLst/>
+          </a:prstGeom>
+          <a:solidFill>
+            <a:srgbClr val="001E3C"/>
+          </a:solidFill>
+          <a:ln w="12700">
+            <a:solidFill>
+              <a:srgbClr val="001E3C"/>
+            </a:solidFill>
+            <a:prstDash val="solid"/>
+          </a:ln>
+        </p:spPr>
+        <p:txBody>
+          <a:bodyPr/>
+          <a:p/>
+        </p:txBody>
+      </p:sp>
+      <p:sp>
+        <p:nvSpPr>
+          <p:cNvPr id="33" name="Text 29"/>
+          <p:cNvSpPr txBox="1"/>
+          <p:nvPr/>
+        </p:nvSpPr>
+        <p:spPr>
+          <a:xfrm>
+            <a:off x="4892040" y="3895344"/>
+            <a:ext cx="310896" cy="310896"/>
+          </a:xfrm>
+          <a:prstGeom prst="rect">
+            <a:avLst/>
+          </a:prstGeom>
+          <a:noFill/>
+          <a:ln/>
+        </p:spPr>
+        <p:txBody>
+          <a:bodyPr wrap="square" lIns="0" tIns="0" rIns="0" bIns="0" rtlCol="0" anchor="ctr"/>
+          <a:lstStyle/>
+          <a:p>
+            <a:pPr algn="ctr" indent="0" marL="0">
+              <a:buNone/>
+            </a:pPr>
+            <a:r>
+              <a:rPr lang="en-US" sz="1100" b="1" dirty="0">
+                <a:solidFill>
+                  <a:srgbClr val="FFFFFF"/>
+                </a:solidFill>
+                <a:latin typeface="Consolas" pitchFamily="34" charset="0"/>
+                <a:ea typeface="Consolas" pitchFamily="34" charset="-122"/>
+                <a:cs typeface="Consolas" pitchFamily="34" charset="-120"/>
+              </a:rPr>
+              <a:t>3</a:t>
+            </a:r>
+            <a:endParaRPr lang="en-US" sz="1100" dirty="0"/>
+          </a:p>
+        </p:txBody>
+      </p:sp>
+      <p:sp>
+        <p:nvSpPr>
+          <p:cNvPr id="34" name="Text 30"/>
+          <p:cNvSpPr txBox="1"/>
+          <p:nvPr/>
+        </p:nvSpPr>
+        <p:spPr>
+          <a:xfrm>
+            <a:off x="5330952" y="3904488"/>
+            <a:ext cx="3172968" cy="274320"/>
+          </a:xfrm>
+          <a:prstGeom prst="rect">
+            <a:avLst/>
+          </a:prstGeom>
+          <a:noFill/>
+          <a:ln/>
+        </p:spPr>
+        <p:txBody>
+          <a:bodyPr wrap="square" lIns="0" tIns="0" rIns="0" bIns="0" rtlCol="0" anchor="t"/>
+          <a:lstStyle/>
+          <a:p>
+            <a:pPr indent="0" marL="0">
+              <a:buNone/>
+            </a:pPr>
+            <a:r>
+              <a:rPr lang="en-US" sz="1200" b="1" dirty="0">
+                <a:solidFill>
+                  <a:srgbClr val="001E3C"/>
+                </a:solidFill>
+                <a:latin typeface="Meiryo" pitchFamily="34" charset="0"/>
+                <a:ea typeface="Meiryo" pitchFamily="34" charset="-122"/>
+                <a:cs typeface="Meiryo" pitchFamily="34" charset="-120"/>
+              </a:rPr>
+              <a:t>WG 一覧から開く</a:t>
+            </a:r>
+            <a:endParaRPr lang="en-US" sz="1200" dirty="0"/>
+          </a:p>
+        </p:txBody>
+      </p:sp>
+      <p:sp>
+        <p:nvSpPr>
+          <p:cNvPr id="35" name="Text 31"/>
+          <p:cNvSpPr txBox="1"/>
+          <p:nvPr/>
+        </p:nvSpPr>
+        <p:spPr>
+          <a:xfrm>
+            <a:off x="5330952" y="4169664"/>
+            <a:ext cx="3172968" cy="512064"/>
+          </a:xfrm>
+          <a:prstGeom prst="rect">
+            <a:avLst/>
+          </a:prstGeom>
+          <a:noFill/>
+          <a:ln/>
+        </p:spPr>
+        <p:txBody>
+          <a:bodyPr wrap="square" lIns="0" tIns="0" rIns="0" bIns="0" rtlCol="0" anchor="t"/>
+          <a:lstStyle/>
+          <a:p>
+            <a:pPr indent="0" marL="0">
+              <a:buNone/>
+            </a:pPr>
+            <a:r>
+              <a:rPr lang="en-US" sz="1000" dirty="0">
+                <a:solidFill>
+                  <a:srgbClr val="1B2B3A"/>
+                </a:solidFill>
+                <a:latin typeface="Meiryo" pitchFamily="34" charset="0"/>
+                <a:ea typeface="Meiryo" pitchFamily="34" charset="-122"/>
+                <a:cs typeface="Meiryo" pitchFamily="34" charset="-120"/>
+              </a:rPr>
+              <a:t>直打ちでは開かない。カードのボタンから辿る</a:t>
+            </a:r>
+            <a:endParaRPr lang="en-US" sz="1000" dirty="0"/>
+          </a:p>
+        </p:txBody>
+      </p:sp>
+      <p:sp>
+        <p:nvSpPr>
+          <p:cNvPr id="19" name="Text 14"/>
+          <p:cNvSpPr txBox="1"/>
+          <p:nvPr/>
+        </p:nvSpPr>
+        <p:spPr>
+          <a:xfrm>
+            <a:off x="457200" y="4681728"/>
+            <a:ext cx="8229600" cy="365760"/>
+          </a:xfrm>
+          <a:prstGeom prst="rect">
+            <a:avLst/>
+          </a:prstGeom>
+          <a:noFill/>
+          <a:ln/>
+        </p:spPr>
+        <p:txBody>
+          <a:bodyPr wrap="square" lIns="0" tIns="0" rIns="0" bIns="0" rtlCol="0" anchor="t"/>
+          <a:lstStyle/>
+          <a:p>
+            <a:pPr indent="0" marL="0">
+              <a:buNone/>
+            </a:pPr>
+            <a:r>
+              <a:rPr lang="en-US" sz="1050" dirty="0">
+                <a:solidFill>
+                  <a:srgbClr val="5A6B7B"/>
+                </a:solidFill>
+                <a:latin typeface="Meiryo" pitchFamily="34" charset="0"/>
+                <a:ea typeface="Meiryo" pitchFamily="34" charset="-122"/>
+                <a:cs typeface="Meiryo" pitchFamily="34" charset="-120"/>
+              </a:rPr>
+              <a:t>wg-apps.yml に登録するまでは取り込まれない。WG がマージしても、サイトには出ない（homepage が作り直されるだけ）。</a:t>
+            </a:r>
+            <a:endParaRPr lang="en-US" sz="1050" dirty="0"/>
+          </a:p>
+        </p:txBody>
+      </p:sp>
+      <p:pic>
+        <p:nvPicPr>
+          <p:cNvPr id="39" name="Picture 38" descr="image.png"/>
+          <p:cNvPicPr>
+            <a:picLocks noChangeAspect="1"/>
+          </p:cNvPicPr>
+          <p:nvPr/>
+        </p:nvPicPr>
+        <p:blipFill>
+          <a:blip r:embed="rId9"/>
+          <a:stretch>
+            <a:fillRect/>
+          </a:stretch>
+        </p:blipFill>
+        <p:spPr>
+          <a:xfrm>
+            <a:off x="5010912" y="1737360"/>
+            <a:ext cx="219456" cy="219456"/>
+          </a:xfrm>
+          <a:prstGeom prst="rect">
+            <a:avLst/>
+          </a:prstGeom>
+        </p:spPr>
+      </p:pic>
+      <p:pic>
+        <p:nvPicPr>
+          <p:cNvPr id="40" name="Picture 39" descr="image.png"/>
+          <p:cNvPicPr>
+            <a:picLocks noChangeAspect="1"/>
+          </p:cNvPicPr>
+          <p:nvPr/>
+        </p:nvPicPr>
+        <p:blipFill>
+          <a:blip r:embed="rId10"/>
+          <a:stretch>
+            <a:fillRect/>
+          </a:stretch>
+        </p:blipFill>
+        <p:spPr>
+          <a:xfrm>
+            <a:off x="804672" y="1737360"/>
+            <a:ext cx="219456" cy="219456"/>
+          </a:xfrm>
+          <a:prstGeom prst="rect">
+            <a:avLst/>
+          </a:prstGeom>
+        </p:spPr>
+      </p:pic>
+    </p:spTree>
+  </p:cSld>
+  <p:clrMapOvr>
+    <a:masterClrMapping/>
+  </p:clrMapOvr>
+</p:sld>
+</file>
+
+<file path=ppt/slides/slide13.xml><?xml version="1.0" encoding="utf-8"?>
 <p:sld xmlns:a="http://schemas.openxmlformats.org/drawingml/2006/main" xmlns:r="http://schemas.openxmlformats.org/officeDocument/2006/relationships" xmlns:p="http://schemas.openxmlformats.org/presentationml/2006/main">
   <p:cSld name="Slide 11">
     <p:bg>

--- a/static/guide/01_リポジトリの作り方と運用.pptx
+++ b/static/guide/01_リポジトリの作り方と運用.pptx
@@ -1393,7 +1393,7 @@
           <a:lstStyle/>
           <a:p>
             <a:r>
-              <a:t>homepage 側の登録と、できたかの確かめ方です。wg-apps.yml に 1 行足して push すると、次のデプロイから取り込まれます。アプリができたら /edit/ で URL を入れ、状態を「活動中」に。公表のときは as を works に変えるだけで、URL は変わりません。確かめるときは、WG の Actions（10 秒ほどで緑）と homepage の Actions（5〜9 分）の両方を見ます。</a:t>
+              <a:t>GitHub 側の登録です。①は、GitHub App funitclub-wg-deploy をその WG のリポジトリに入れるところ。github.com/funITclub の「Settings」→ 左メニューのいちばん下の 「Developer settings」→「GitHub Apps」→ funitclub-wg-deploy の「Edit」→ 左の 「Install App」→ funITclub の歯車 →「Select repositories」で wg-&lt;名前&gt; を足して「Save」。②は、その App を使うための鍵とシークレット。App の左「Credentials」→「Key pairs」→「New key」で .pem を作り（落とせるのはこの時だけ）、WG のリポジトリの「Settings」→「Secrets and variables」→「Actions」→「New repository secret」で 2 つ登録します。登録したら手元の .pem は消します。</a:t>
             </a:r>
           </a:p>
         </p:txBody>
@@ -4136,7 +4136,7 @@
                 <a:ea typeface="Meiryo" pitchFamily="34" charset="-122"/>
                 <a:cs typeface="Meiryo" pitchFamily="34" charset="-120"/>
               </a:rPr>
-              <a:t>アプリをこのリポジトリに入れる</a:t>
+              <a:t>① アプリをこのリポジトリに入れる</a:t>
             </a:r>
             <a:endParaRPr lang="en-US" sz="1400" dirty="0"/>
           </a:p>
@@ -4243,7 +4243,7 @@
                 <a:ea typeface="Meiryo" pitchFamily="34" charset="-122"/>
                 <a:cs typeface="Meiryo" pitchFamily="34" charset="-120"/>
               </a:rPr>
-              <a:t>org の設定を開く</a:t>
+              <a:t>Developer settings を開く</a:t>
             </a:r>
             <a:endParaRPr lang="en-US" sz="1200" dirty="0"/>
           </a:p>
@@ -4282,7 +4282,7 @@
                 <a:ea typeface="Meiryo" pitchFamily="34" charset="-122"/>
                 <a:cs typeface="Meiryo" pitchFamily="34" charset="-120"/>
               </a:rPr>
-              <a:t>github.com/funITclub →「Settings」→ 左の下「Developer settings」</a:t>
+              <a:t>github.com/funITclub → 上のタブ「Settings」→ 左メニューのいちばん下</a:t>
             </a:r>
             <a:endParaRPr lang="en-US" sz="1000" dirty="0"/>
           </a:p>
@@ -4428,7 +4428,7 @@
                 <a:ea typeface="Meiryo" pitchFamily="34" charset="-122"/>
                 <a:cs typeface="Meiryo" pitchFamily="34" charset="-120"/>
               </a:rPr>
-              <a:t>「GitHub Apps」→ funitclub-wg-deploy の「Edit」</a:t>
+              <a:t>「GitHub Apps」→ 一覧の funitclub-wg-deploy の右の「Edit」</a:t>
             </a:r>
             <a:endParaRPr lang="en-US" sz="1000" dirty="0"/>
           </a:p>
@@ -4574,7 +4574,7 @@
                 <a:ea typeface="Meiryo" pitchFamily="34" charset="-122"/>
                 <a:cs typeface="Meiryo" pitchFamily="34" charset="-120"/>
               </a:rPr>
-              <a:t>左の「Install App」→ funITclub の歯車 →「Select repositories」→ 保存</a:t>
+              <a:t>左の「Install App」→ funITclub の歯車 → wg-&lt;名前&gt; を選び「Save」</a:t>
             </a:r>
             <a:endParaRPr lang="en-US" sz="1000" dirty="0"/>
           </a:p>
@@ -4678,7 +4678,7 @@
                 <a:ea typeface="Meiryo" pitchFamily="34" charset="-122"/>
                 <a:cs typeface="Meiryo" pitchFamily="34" charset="-120"/>
               </a:rPr>
-              <a:t>鍵とシークレットを登録する</a:t>
+              <a:t>② 鍵とシークレットを登録する</a:t>
             </a:r>
             <a:endParaRPr lang="en-US" sz="1400" dirty="0"/>
           </a:p>
@@ -4824,7 +4824,7 @@
                 <a:ea typeface="Meiryo" pitchFamily="34" charset="-122"/>
                 <a:cs typeface="Meiryo" pitchFamily="34" charset="-120"/>
               </a:rPr>
-              <a:t>App の左「Credentials」→「Key pairs」→「New key」。この時だけ落とせる</a:t>
+              <a:t>同じ App の左「Credentials」→「Key pairs」→「New key」。この時だけ落とせる</a:t>
             </a:r>
             <a:endParaRPr lang="en-US" sz="1000" dirty="0"/>
           </a:p>
@@ -4931,7 +4931,7 @@
                 <a:ea typeface="Meiryo" pitchFamily="34" charset="-122"/>
                 <a:cs typeface="Meiryo" pitchFamily="34" charset="-120"/>
               </a:rPr>
-              <a:t>アプリの登録</a:t>
+              <a:t>WG の Secrets を開く</a:t>
             </a:r>
             <a:endParaRPr lang="en-US" sz="1200" dirty="0"/>
           </a:p>
@@ -4970,7 +4970,7 @@
                 <a:ea typeface="Meiryo" pitchFamily="34" charset="-122"/>
                 <a:cs typeface="Meiryo" pitchFamily="34" charset="-120"/>
               </a:rPr>
-              <a:t>WG の「Settings」→「Secrets and variables」→「Actions」→ HOMEPAGE_DEPLOY_APP_ID</a:t>
+              <a:t>WG のリポジトリ →「Settings」→ 左の「Secrets and variables」→「Actions」</a:t>
             </a:r>
             <a:endParaRPr lang="en-US" sz="1000" dirty="0"/>
           </a:p>
@@ -5077,7 +5077,7 @@
                 <a:ea typeface="Meiryo" pitchFamily="34" charset="-122"/>
                 <a:cs typeface="Meiryo" pitchFamily="34" charset="-120"/>
               </a:rPr>
-              <a:t>pem の登録</a:t>
+              <a:t>2 つ入れる</a:t>
             </a:r>
             <a:endParaRPr lang="en-US" sz="1200" dirty="0"/>
           </a:p>
@@ -5116,7 +5116,7 @@
                 <a:ea typeface="Meiryo" pitchFamily="34" charset="-122"/>
                 <a:cs typeface="Meiryo" pitchFamily="34" charset="-120"/>
               </a:rPr>
-              <a:t>同じ画面で HOMEPAGE_DEPLOY_PRIVATE_KEY に .pem の中身。入れたら消す</a:t>
+              <a:t>「New repository secret」を 2 回押して、下の名前で登録する</a:t>
             </a:r>
             <a:endParaRPr lang="en-US" sz="1000" dirty="0"/>
           </a:p>
@@ -5179,7 +5179,7 @@
                 <a:ea typeface="Meiryo" pitchFamily="34" charset="-122"/>
                 <a:cs typeface="Meiryo" pitchFamily="34" charset="-120"/>
               </a:rPr>
-              <a:t>App ID は App の「General」に出ている数字。鍵は作ったときだけ表示されるので、登録したら手元の .pem は消す。</a:t>
+              <a:t>名前は HOMEPAGE_DEPLOY_APP_ID（App の「General」に出ている数字）と HOMEPAGE_DEPLOY_PRIVATE_KEY（.pem の中身）。登録したら手元の .pem は消す。</a:t>
             </a:r>
             <a:endParaRPr lang="en-US" sz="1050" dirty="0"/>
           </a:p>

--- a/static/guide/01_リポジトリの作り方と運用.pptx
+++ b/static/guide/01_リポジトリの作り方と運用.pptx
@@ -1393,7 +1393,7 @@
           <a:lstStyle/>
           <a:p>
             <a:r>
-              <a:t>GitHub 側の登録です。①は、GitHub App funitclub-wg-deploy をその WG のリポジトリに入れるところ。github.com/funITclub の「Settings」→ 左メニューのいちばん下の 「Developer settings」→「GitHub Apps」→ funitclub-wg-deploy の「Edit」→ 左の 「Install App」→ funITclub の歯車 →「Select repositories」で wg-&lt;名前&gt; を足して「Save」。②は、その App を使うための鍵とシークレット。App の左「Credentials」→「Key pairs」→「New key」で .pem を作り（落とせるのはこの時だけ）、WG のリポジトリの「Settings」→「Secrets and variables」→「Actions」→「New repository secret」で 2 つ登録します。登録したら手元の .pem は消します。</a:t>
+              <a:t>GitHub 側の登録です。①は、GitHub App funitclub-wg-deploy をその WG のリポジトリに入れるところ。github.com/funITclub の「Settings」→ 左メニューのいちばん下の 「Developer settings」→「GitHub Apps」→ funitclub-wg-deploy の「Edit」→ 左の 「Install App」→ funITclub の歯車 →「Select repositories」で wg-&lt;名前&gt; を足して「Save」。②は、その App を使うための鍵とシークレット。インストールの画面には「Credentials」が無いので、①の「Edit」の画面に戻ってから、左の「Credentials」→「Key pairs」→「New key」で .pem を作り（落とせるのはこの時だけ）、WG のリポジトリの「Settings」→「Secrets and variables」→「Actions」→「New repository secret」で 2 つ登録します。登録したら手元の .pem は消します。</a:t>
             </a:r>
           </a:p>
         </p:txBody>
@@ -4785,7 +4785,7 @@
                 <a:ea typeface="Meiryo" pitchFamily="34" charset="-122"/>
                 <a:cs typeface="Meiryo" pitchFamily="34" charset="-120"/>
               </a:rPr>
-              <a:t>pem を作る</a:t>
+              <a:t>App の設定に戻って pem を作る</a:t>
             </a:r>
             <a:endParaRPr lang="en-US" sz="1200" dirty="0"/>
           </a:p>
@@ -4824,7 +4824,7 @@
                 <a:ea typeface="Meiryo" pitchFamily="34" charset="-122"/>
                 <a:cs typeface="Meiryo" pitchFamily="34" charset="-120"/>
               </a:rPr>
-              <a:t>同じ App の左「Credentials」→「Key pairs」→「New key」。この時だけ落とせる</a:t>
+              <a:t>①の「Edit」の画面へ戻る →「Credentials」→「Key pairs」→「New key」</a:t>
             </a:r>
             <a:endParaRPr lang="en-US" sz="1000" dirty="0"/>
           </a:p>

--- a/static/guide/01_リポジトリの作り方と運用.pptx
+++ b/static/guide/01_リポジトリの作り方と運用.pptx
@@ -14195,7 +14195,7 @@
                 <a:ea typeface="Meiryo" pitchFamily="34" charset="-122"/>
                 <a:cs typeface="Meiryo" pitchFamily="34" charset="-120"/>
               </a:rPr>
-              <a:t>WG紹介にチーム名を入れる</a:t>
+              <a:t>WG紹介にチームと Chat を入れる</a:t>
             </a:r>
             <a:endParaRPr lang="en-US" sz="2600" dirty="0"/>
           </a:p>
@@ -14440,7 +14440,7 @@
                 <a:ea typeface="Meiryo" pitchFamily="34" charset="-122"/>
                 <a:cs typeface="Meiryo" pitchFamily="34" charset="-120"/>
               </a:rPr>
-              <a:t>「GitHub のチーム」を入れる</a:t>
+              <a:t>チームと Chat スペースを入れる</a:t>
             </a:r>
             <a:endParaRPr lang="en-US" sz="1250" dirty="0"/>
           </a:p>
@@ -14479,7 +14479,7 @@
                 <a:ea typeface="Meiryo" pitchFamily="34" charset="-122"/>
                 <a:cs typeface="Meiryo" pitchFamily="34" charset="-120"/>
               </a:rPr>
-              <a:t>手順 3 で作ったチームの名前（例 wg-countdown）</a:t>
+              <a:t>チーム名と、Google Chat で作ったスペースの URL</a:t>
             </a:r>
             <a:endParaRPr lang="en-US" sz="1050" dirty="0"/>
           </a:p>
@@ -16095,7 +16095,7 @@
                 <a:ea typeface="Meiryo" pitchFamily="34" charset="-122"/>
                 <a:cs typeface="Meiryo" pitchFamily="34" charset="-120"/>
               </a:rPr>
-              <a:t>チームに追加</a:t>
+              <a:t>Chat とチームに追加</a:t>
             </a:r>
             <a:endParaRPr lang="en-US" sz="1300" dirty="0"/>
           </a:p>
@@ -16137,7 +16137,7 @@
                 <a:ea typeface="Meiryo" pitchFamily="34" charset="-122"/>
                 <a:cs typeface="Meiryo" pitchFamily="34" charset="-120"/>
               </a:rPr>
-              <a:t>GitHub でログイン。org にいなければ招待が届く</a:t>
+              <a:t>Chat に追加。GitHub でログインしてチームへ</a:t>
             </a:r>
             <a:endParaRPr lang="en-US" sz="950" dirty="0"/>
           </a:p>
@@ -16201,7 +16201,7 @@
                 <a:ea typeface="Meiryo" pitchFamily="34" charset="-122"/>
                 <a:cs typeface="Meiryo" pitchFamily="34" charset="-120"/>
               </a:rPr>
-              <a:t>運営の作業はない</a:t>
+              <a:t>運営の作業は開設のときだけ</a:t>
             </a:r>
             <a:endParaRPr lang="en-US" sz="1100" dirty="0"/>
           </a:p>
@@ -16243,7 +16243,7 @@
                 <a:ea typeface="Meiryo" pitchFamily="34" charset="-122"/>
                 <a:cs typeface="Meiryo" pitchFamily="34" charset="-120"/>
               </a:rPr>
-              <a:t>チームを作ってサイトに登録しておけば、あとは本人が進める。Chat は Classroom の授業のリンクから本人が入る。</a:t>
+              <a:t>チームと Chat スペースを作ってサイトに登録すれば、あとは本人が進める。失敗したときだけ通知が届く。</a:t>
             </a:r>
             <a:endParaRPr lang="en-US" sz="900" dirty="0"/>
           </a:p>
@@ -16455,7 +16455,7 @@
                 <a:ea typeface="Meiryo" pitchFamily="34" charset="-122"/>
                 <a:cs typeface="Meiryo" pitchFamily="34" charset="-120"/>
               </a:rPr>
-              <a:t>名簿を読む許可は運営（クラスの先生）のアカウント。替わったら許可し直す（deploy.txt）。</a:t>
+              <a:t>名簿・招待・Chat の許可は運営（クラスの先生）のアカウント。替わったら許可し直す（deploy.txt）。</a:t>
             </a:r>
             <a:endParaRPr lang="en-US" sz="900" dirty="0"/>
           </a:p>
@@ -17072,7 +17072,7 @@
                 <a:ea typeface="Meiryo" pitchFamily="34" charset="-122"/>
                 <a:cs typeface="Meiryo" pitchFamily="34" charset="-120"/>
               </a:rPr>
-              <a:t>Classroom からも外す</a:t>
+              <a:t>Classroom・Chat からも外す</a:t>
             </a:r>
             <a:endParaRPr lang="en-US" sz="1200" dirty="0"/>
           </a:p>
@@ -17111,7 +17111,7 @@
                 <a:ea typeface="Meiryo" pitchFamily="34" charset="-122"/>
                 <a:cs typeface="Meiryo" pitchFamily="34" charset="-120"/>
               </a:rPr>
-              <a:t>外さないと「WG に参加」を通れてしまう</a:t>
+              <a:t>Classroom を外さないと「WG に参加」を通れる</a:t>
             </a:r>
             <a:endParaRPr lang="en-US" sz="1000" dirty="0"/>
           </a:p>

--- a/static/guide/01_リポジトリの作り方と運用.pptx
+++ b/static/guide/01_リポジトリの作り方と運用.pptx
@@ -3608,7 +3608,7 @@
                 <a:ea typeface="Meiryo" pitchFamily="34" charset="-122"/>
                 <a:cs typeface="Meiryo" pitchFamily="34" charset="-120"/>
               </a:rPr>
-              <a:t>/&lt;名前&gt;/ で動く。一覧から辿って開く</a:t>
+              <a:t>/&lt;名前&gt;/… で動く。一覧から辿って開く</a:t>
             </a:r>
             <a:endParaRPr lang="en-US" sz="950" dirty="0"/>
           </a:p>
@@ -5524,7 +5524,7 @@
                 <a:ea typeface="Meiryo" pitchFamily="34" charset="-122"/>
                 <a:cs typeface="Meiryo" pitchFamily="34" charset="-120"/>
               </a:rPr>
-              <a:t>wg-apps.yml に 1 行足す</a:t>
+              <a:t>wg-apps.yml に足す</a:t>
             </a:r>
             <a:endParaRPr lang="en-US" sz="1200" dirty="0"/>
           </a:p>
@@ -5563,7 +5563,7 @@
                 <a:ea typeface="Meiryo" pitchFamily="34" charset="-122"/>
                 <a:cs typeface="Meiryo" pitchFamily="34" charset="-120"/>
               </a:rPr>
-              <a:t>repo・take・as を書いて push。これで /&lt;名前&gt;/ が生える</a:t>
+              <a:t>WG のマージ後に push。/&lt;名前&gt;/activity/ が生える</a:t>
             </a:r>
             <a:endParaRPr lang="en-US" sz="1000" dirty="0"/>
           </a:p>
@@ -5670,7 +5670,7 @@
                 <a:ea typeface="Meiryo" pitchFamily="34" charset="-122"/>
                 <a:cs typeface="Meiryo" pitchFamily="34" charset="-120"/>
               </a:rPr>
-              <a:t>Webアプリの URL を入れる</a:t>
+              <a:t>掲載は WG が /edit/ で</a:t>
             </a:r>
             <a:endParaRPr lang="en-US" sz="1200" dirty="0"/>
           </a:p>
@@ -5709,7 +5709,7 @@
                 <a:ea typeface="Meiryo" pitchFamily="34" charset="-122"/>
                 <a:cs typeface="Meiryo" pitchFamily="34" charset="-120"/>
               </a:rPr>
-              <a:t>アプリができたら /edit/ の WG紹介に。状態も「活動中」にする</a:t>
+              <a:t>ログイン情報は Classroom に掲示してある</a:t>
             </a:r>
             <a:endParaRPr lang="en-US" sz="1000" dirty="0"/>
           </a:p>
@@ -6436,7 +6436,7 @@
                 <a:ea typeface="Meiryo" pitchFamily="34" charset="-122"/>
                 <a:cs typeface="Meiryo" pitchFamily="34" charset="-120"/>
               </a:rPr>
-              <a:t>wg-apps.yml に登録するまでは取り込まれない。WG がマージしても、サイトには出ない（homepage が作り直されるだけ）。</a:t>
+              <a:t>WG のマージより先に登録すると、取り込むフォルダーが無くてデプロイが止まる（本番は前の版のまま）。</a:t>
             </a:r>
             <a:endParaRPr lang="en-US" sz="1050" dirty="0"/>
           </a:p>
@@ -8498,7 +8498,7 @@
                 <a:ea typeface="Meiryo" pitchFamily="34" charset="-122"/>
                 <a:cs typeface="Meiryo" pitchFamily="34" charset="-120"/>
               </a:rPr>
-              <a:t>抜けた人を外し、終わったらアーカイブ</a:t>
+              <a:t>活動ページを登録。抜けた人を外し、終わったらアーカイブ</a:t>
             </a:r>
             <a:endParaRPr lang="en-US" sz="1100" dirty="0"/>
           </a:p>
@@ -10128,13 +10128,13 @@
             <a:r>
               <a:rPr lang="en-US" sz="850" dirty="0">
                 <a:solidFill>
-                  <a:srgbClr val="1B2B3A"/>
-                </a:solidFill>
-                <a:latin typeface="Meiryo" pitchFamily="34" charset="0"/>
-                <a:ea typeface="Meiryo" pitchFamily="34" charset="-122"/>
-                <a:cs typeface="Meiryo" pitchFamily="34" charset="-120"/>
-              </a:rPr>
-              <a:t>GitHub</a:t>
+                  <a:srgbClr val="5A6B7B"/>
+                </a:solidFill>
+                <a:latin typeface="Meiryo" pitchFamily="34" charset="0"/>
+                <a:ea typeface="Meiryo" pitchFamily="34" charset="-122"/>
+                <a:cs typeface="Meiryo" pitchFamily="34" charset="-120"/>
+              </a:rPr>
+              <a:t>（空欄のまま）</a:t>
             </a:r>
             <a:endParaRPr lang="en-US" sz="850" dirty="0"/>
           </a:p>
@@ -14724,7 +14724,7 @@
                 <a:ea typeface="Meiryo" pitchFamily="34" charset="-122"/>
                 <a:cs typeface="Meiryo" pitchFamily="34" charset="-120"/>
               </a:rPr>
-              <a:t>アプリができたら直す</a:t>
+              <a:t>その後の掲載は WG が行う</a:t>
             </a:r>
             <a:endParaRPr lang="en-US" sz="1250" dirty="0"/>
           </a:p>
@@ -14763,7 +14763,7 @@
                 <a:ea typeface="Meiryo" pitchFamily="34" charset="-122"/>
                 <a:cs typeface="Meiryo" pitchFamily="34" charset="-120"/>
               </a:rPr>
-              <a:t>状態を「活動中」、Webアプリの URL を入れる</a:t>
+              <a:t>活動ページ・アプリの URL と「活動中」。ログイン情報は Classroom</a:t>
             </a:r>
             <a:endParaRPr lang="en-US" sz="1050" dirty="0"/>
           </a:p>
@@ -15307,7 +15307,7 @@
                 <a:ea typeface="Meiryo" pitchFamily="34" charset="-122"/>
                 <a:cs typeface="Meiryo" pitchFamily="34" charset="-120"/>
               </a:rPr>
-              <a:t>「準備中」のままでも参加できる。アプリができたら「活動中」に変える（TOP の件数もここで連動する）。</a:t>
+              <a:t>「準備中」のままでも参加できる。アプリができたら WG が「活動中」に変える（TOP の件数も連動する）。</a:t>
             </a:r>
             <a:endParaRPr lang="en-US" sz="1050" dirty="0"/>
           </a:p>
@@ -17657,7 +17657,7 @@
                 <a:ea typeface="Meiryo" pitchFamily="34" charset="-122"/>
                 <a:cs typeface="Meiryo" pitchFamily="34" charset="-120"/>
               </a:rPr>
-              <a:t>homepage の wg-apps.yml から外す。次のデプロイで消える</a:t>
+              <a:t>wg-apps.yml から外す。DB のテーブルは残るので別に消す</a:t>
             </a:r>
             <a:endParaRPr lang="en-US" sz="1000" dirty="0"/>
           </a:p>
